--- a/presentation/OndeSanMarcos.pptx
+++ b/presentation/OndeSanMarcos.pptx
@@ -4737,21 +4737,16 @@
         </p:nvSpPr>
         <p:spPr>
           <a:xfrm>
-            <a:off x="640080" y="5029200"/>
-            <a:ext cx="4206240" cy="0"/>
-          </a:xfrm>
-          <a:prstGeom prst="line">
-            <a:avLst/>
-          </a:prstGeom>
-          <a:noFill/>
-          <a:ln w="12700">
-            <a:solidFill>
-              <a:srgbClr val="2A2C35"/>
-            </a:solidFill>
-            <a:prstDash val="solid"/>
-            <a:headEnd type="none"/>
-            <a:tailEnd type="none"/>
-          </a:ln>
+            <a:off x="640080" y="5022850"/>
+            <a:ext cx="4206240" cy="12700"/>
+          </a:xfrm>
+          <a:prstGeom prst="rect">
+            <a:avLst/>
+          </a:prstGeom>
+          <a:solidFill>
+            <a:srgbClr val="2A2C35"/>
+          </a:solidFill>
+          <a:ln/>
         </p:spPr>
       </p:sp>
       <p:sp>
@@ -4840,21 +4835,16 @@
         </p:nvSpPr>
         <p:spPr>
           <a:xfrm>
-            <a:off x="640080" y="6419088"/>
-            <a:ext cx="10911535" cy="0"/>
-          </a:xfrm>
-          <a:prstGeom prst="line">
-            <a:avLst/>
-          </a:prstGeom>
-          <a:noFill/>
-          <a:ln w="9525">
-            <a:solidFill>
-              <a:srgbClr val="2A2C35"/>
-            </a:solidFill>
-            <a:prstDash val="solid"/>
-            <a:headEnd type="none"/>
-            <a:tailEnd type="none"/>
-          </a:ln>
+            <a:off x="640080" y="6413602"/>
+            <a:ext cx="10911535" cy="10973"/>
+          </a:xfrm>
+          <a:prstGeom prst="rect">
+            <a:avLst/>
+          </a:prstGeom>
+          <a:solidFill>
+            <a:srgbClr val="2A2C35"/>
+          </a:solidFill>
+          <a:ln/>
         </p:spPr>
       </p:sp>
       <p:sp>
@@ -5073,21 +5063,16 @@
         </p:nvSpPr>
         <p:spPr>
           <a:xfrm>
-            <a:off x="640080" y="6419088"/>
-            <a:ext cx="10911535" cy="0"/>
-          </a:xfrm>
-          <a:prstGeom prst="line">
-            <a:avLst/>
-          </a:prstGeom>
-          <a:noFill/>
-          <a:ln w="9525">
-            <a:solidFill>
-              <a:srgbClr val="2A2C35"/>
-            </a:solidFill>
-            <a:prstDash val="solid"/>
-            <a:headEnd type="none"/>
-            <a:tailEnd type="none"/>
-          </a:ln>
+            <a:off x="640080" y="6413602"/>
+            <a:ext cx="10911535" cy="10973"/>
+          </a:xfrm>
+          <a:prstGeom prst="rect">
+            <a:avLst/>
+          </a:prstGeom>
+          <a:solidFill>
+            <a:srgbClr val="2A2C35"/>
+          </a:solidFill>
+          <a:ln/>
         </p:spPr>
       </p:sp>
       <p:sp>
@@ -6443,21 +6428,16 @@
         </p:nvSpPr>
         <p:spPr>
           <a:xfrm>
-            <a:off x="640080" y="6419088"/>
-            <a:ext cx="10911535" cy="0"/>
-          </a:xfrm>
-          <a:prstGeom prst="line">
-            <a:avLst/>
-          </a:prstGeom>
-          <a:noFill/>
-          <a:ln w="9525">
-            <a:solidFill>
-              <a:srgbClr val="2A2C35"/>
-            </a:solidFill>
-            <a:prstDash val="solid"/>
-            <a:headEnd type="none"/>
-            <a:tailEnd type="none"/>
-          </a:ln>
+            <a:off x="640080" y="6413602"/>
+            <a:ext cx="10911535" cy="10973"/>
+          </a:xfrm>
+          <a:prstGeom prst="rect">
+            <a:avLst/>
+          </a:prstGeom>
+          <a:solidFill>
+            <a:srgbClr val="2A2C35"/>
+          </a:solidFill>
+          <a:ln/>
         </p:spPr>
       </p:sp>
       <p:sp>
@@ -7263,22 +7243,17 @@
           <p:nvPr/>
         </p:nvSpPr>
         <p:spPr>
-          <a:xfrm>
-            <a:off x="5257800" y="3566160"/>
-            <a:ext cx="-1463040" cy="-822960"/>
-          </a:xfrm>
-          <a:prstGeom prst="line">
-            <a:avLst/>
-          </a:prstGeom>
-          <a:noFill/>
-          <a:ln w="15875">
-            <a:solidFill>
-              <a:srgbClr val="2DD4A7"/>
-            </a:solidFill>
-            <a:prstDash val="solid"/>
-            <a:headEnd type="none"/>
-            <a:tailEnd type="triangle"/>
-          </a:ln>
+          <a:xfrm rot="-9038535">
+            <a:off x="3763984" y="3166916"/>
+            <a:ext cx="1596319" cy="15875"/>
+          </a:xfrm>
+          <a:prstGeom prst="rect">
+            <a:avLst/>
+          </a:prstGeom>
+          <a:solidFill>
+            <a:srgbClr val="2DD4A7"/>
+          </a:solidFill>
+          <a:ln/>
         </p:spPr>
       </p:sp>
       <p:sp>
@@ -7288,22 +7263,17 @@
           <p:nvPr/>
         </p:nvSpPr>
         <p:spPr>
-          <a:xfrm>
-            <a:off x="6949440" y="3566160"/>
-            <a:ext cx="1463040" cy="-822960"/>
-          </a:xfrm>
-          <a:prstGeom prst="line">
-            <a:avLst/>
-          </a:prstGeom>
-          <a:noFill/>
-          <a:ln w="15875">
-            <a:solidFill>
-              <a:srgbClr val="F5B94D"/>
-            </a:solidFill>
-            <a:prstDash val="solid"/>
-            <a:headEnd type="none"/>
-            <a:tailEnd type="triangle"/>
-          </a:ln>
+          <a:xfrm rot="-3638535">
+            <a:off x="3796240" y="2708242"/>
+            <a:ext cx="116586" cy="137160"/>
+          </a:xfrm>
+          <a:prstGeom prst="triangle">
+            <a:avLst/>
+          </a:prstGeom>
+          <a:solidFill>
+            <a:srgbClr val="2DD4A7"/>
+          </a:solidFill>
+          <a:ln/>
         </p:spPr>
       </p:sp>
       <p:sp>
@@ -7313,22 +7283,17 @@
           <p:nvPr/>
         </p:nvSpPr>
         <p:spPr>
-          <a:xfrm>
-            <a:off x="5257800" y="4206240"/>
-            <a:ext cx="-1463040" cy="457200"/>
-          </a:xfrm>
-          <a:prstGeom prst="line">
-            <a:avLst/>
-          </a:prstGeom>
-          <a:noFill/>
-          <a:ln w="15875">
-            <a:solidFill>
-              <a:srgbClr val="4ADE80"/>
-            </a:solidFill>
-            <a:prstDash val="solid"/>
-            <a:headEnd type="none"/>
-            <a:tailEnd type="triangle"/>
-          </a:ln>
+          <a:xfrm rot="-1761465">
+            <a:off x="6846937" y="3166916"/>
+            <a:ext cx="1596319" cy="15875"/>
+          </a:xfrm>
+          <a:prstGeom prst="rect">
+            <a:avLst/>
+          </a:prstGeom>
+          <a:solidFill>
+            <a:srgbClr val="F5B94D"/>
+          </a:solidFill>
+          <a:ln/>
         </p:spPr>
       </p:sp>
       <p:sp>
@@ -7338,22 +7303,97 @@
           <p:nvPr/>
         </p:nvSpPr>
         <p:spPr>
-          <a:xfrm>
-            <a:off x="6949440" y="4206240"/>
-            <a:ext cx="1463040" cy="457200"/>
-          </a:xfrm>
-          <a:prstGeom prst="line">
-            <a:avLst/>
-          </a:prstGeom>
-          <a:noFill/>
-          <a:ln w="15875">
-            <a:solidFill>
-              <a:srgbClr val="5B8CFF"/>
-            </a:solidFill>
-            <a:prstDash val="solid"/>
-            <a:headEnd type="none"/>
-            <a:tailEnd type="triangle"/>
-          </a:ln>
+          <a:xfrm rot="3638535">
+            <a:off x="8294414" y="2708242"/>
+            <a:ext cx="116586" cy="137160"/>
+          </a:xfrm>
+          <a:prstGeom prst="triangle">
+            <a:avLst/>
+          </a:prstGeom>
+          <a:solidFill>
+            <a:srgbClr val="F5B94D"/>
+          </a:solidFill>
+          <a:ln/>
+        </p:spPr>
+      </p:sp>
+      <p:sp>
+        <p:nvSpPr>
+          <p:cNvPr id="32" name="Shape 30"/>
+          <p:cNvSpPr/>
+          <p:nvPr/>
+        </p:nvSpPr>
+        <p:spPr>
+          <a:xfrm rot="9758759">
+            <a:off x="3840296" y="4414629"/>
+            <a:ext cx="1450518" cy="15875"/>
+          </a:xfrm>
+          <a:prstGeom prst="rect">
+            <a:avLst/>
+          </a:prstGeom>
+          <a:solidFill>
+            <a:srgbClr val="4ADE80"/>
+          </a:solidFill>
+          <a:ln/>
+        </p:spPr>
+      </p:sp>
+      <p:sp>
+        <p:nvSpPr>
+          <p:cNvPr id="33" name="Shape 31"/>
+          <p:cNvSpPr/>
+          <p:nvPr/>
+        </p:nvSpPr>
+        <p:spPr>
+          <a:xfrm rot="15158759">
+            <a:off x="3801925" y="4574404"/>
+            <a:ext cx="116586" cy="137160"/>
+          </a:xfrm>
+          <a:prstGeom prst="triangle">
+            <a:avLst/>
+          </a:prstGeom>
+          <a:solidFill>
+            <a:srgbClr val="4ADE80"/>
+          </a:solidFill>
+          <a:ln/>
+        </p:spPr>
+      </p:sp>
+      <p:sp>
+        <p:nvSpPr>
+          <p:cNvPr id="34" name="Shape 32"/>
+          <p:cNvSpPr/>
+          <p:nvPr/>
+        </p:nvSpPr>
+        <p:spPr>
+          <a:xfrm rot="1041241">
+            <a:off x="6916426" y="4414629"/>
+            <a:ext cx="1450518" cy="15875"/>
+          </a:xfrm>
+          <a:prstGeom prst="rect">
+            <a:avLst/>
+          </a:prstGeom>
+          <a:solidFill>
+            <a:srgbClr val="5B8CFF"/>
+          </a:solidFill>
+          <a:ln/>
+        </p:spPr>
+      </p:sp>
+      <p:sp>
+        <p:nvSpPr>
+          <p:cNvPr id="35" name="Shape 33"/>
+          <p:cNvSpPr/>
+          <p:nvPr/>
+        </p:nvSpPr>
+        <p:spPr>
+          <a:xfrm rot="6441241">
+            <a:off x="8288729" y="4574404"/>
+            <a:ext cx="116586" cy="137160"/>
+          </a:xfrm>
+          <a:prstGeom prst="triangle">
+            <a:avLst/>
+          </a:prstGeom>
+          <a:solidFill>
+            <a:srgbClr val="5B8CFF"/>
+          </a:solidFill>
+          <a:ln/>
         </p:spPr>
       </p:sp>
     </p:spTree>
@@ -7536,21 +7576,16 @@
         </p:nvSpPr>
         <p:spPr>
           <a:xfrm>
-            <a:off x="640080" y="6419088"/>
-            <a:ext cx="10911535" cy="0"/>
-          </a:xfrm>
-          <a:prstGeom prst="line">
-            <a:avLst/>
-          </a:prstGeom>
-          <a:noFill/>
-          <a:ln w="9525">
-            <a:solidFill>
-              <a:srgbClr val="2A2C35"/>
-            </a:solidFill>
-            <a:prstDash val="solid"/>
-            <a:headEnd type="none"/>
-            <a:tailEnd type="none"/>
-          </a:ln>
+            <a:off x="640080" y="6413602"/>
+            <a:ext cx="10911535" cy="10973"/>
+          </a:xfrm>
+          <a:prstGeom prst="rect">
+            <a:avLst/>
+          </a:prstGeom>
+          <a:solidFill>
+            <a:srgbClr val="2A2C35"/>
+          </a:solidFill>
+          <a:ln/>
         </p:spPr>
       </p:sp>
       <p:sp>
@@ -7841,27 +7876,42 @@
           <p:nvPr/>
         </p:nvSpPr>
         <p:spPr>
-          <a:xfrm>
-            <a:off x="978408" y="2788920"/>
-            <a:ext cx="0" cy="73152"/>
-          </a:xfrm>
-          <a:prstGeom prst="line">
-            <a:avLst/>
-          </a:prstGeom>
-          <a:noFill/>
-          <a:ln w="12700">
-            <a:solidFill>
-              <a:srgbClr val="3B3E4A"/>
-            </a:solidFill>
-            <a:prstDash val="solid"/>
-            <a:headEnd type="none"/>
-            <a:tailEnd type="triangle"/>
-          </a:ln>
+          <a:xfrm rot="-5400000">
+            <a:off x="973836" y="2777998"/>
+            <a:ext cx="9144" cy="12700"/>
+          </a:xfrm>
+          <a:prstGeom prst="rect">
+            <a:avLst/>
+          </a:prstGeom>
+          <a:solidFill>
+            <a:srgbClr val="3B3E4A"/>
+          </a:solidFill>
+          <a:ln/>
         </p:spPr>
       </p:sp>
       <p:sp>
         <p:nvSpPr>
           <p:cNvPr id="16" name="Shape 14"/>
+          <p:cNvSpPr/>
+          <p:nvPr/>
+        </p:nvSpPr>
+        <p:spPr>
+          <a:xfrm rot="10800000">
+            <a:off x="920115" y="2724912"/>
+            <a:ext cx="116586" cy="137160"/>
+          </a:xfrm>
+          <a:prstGeom prst="triangle">
+            <a:avLst/>
+          </a:prstGeom>
+          <a:solidFill>
+            <a:srgbClr val="3B3E4A"/>
+          </a:solidFill>
+          <a:ln/>
+        </p:spPr>
+      </p:sp>
+      <p:sp>
+        <p:nvSpPr>
+          <p:cNvPr id="17" name="Shape 15"/>
           <p:cNvSpPr/>
           <p:nvPr/>
         </p:nvSpPr>
@@ -7888,7 +7938,7 @@
       </p:sp>
       <p:sp>
         <p:nvSpPr>
-          <p:cNvPr id="17" name="Shape 15"/>
+          <p:cNvPr id="18" name="Shape 16"/>
           <p:cNvSpPr/>
           <p:nvPr/>
         </p:nvSpPr>
@@ -7908,7 +7958,7 @@
       </p:sp>
       <p:sp>
         <p:nvSpPr>
-          <p:cNvPr id="18" name="Text 16"/>
+          <p:cNvPr id="19" name="Text 17"/>
           <p:cNvSpPr/>
           <p:nvPr/>
         </p:nvSpPr>
@@ -7947,7 +7997,7 @@
       </p:sp>
       <p:sp>
         <p:nvSpPr>
-          <p:cNvPr id="19" name="Text 17"/>
+          <p:cNvPr id="20" name="Text 18"/>
           <p:cNvSpPr/>
           <p:nvPr/>
         </p:nvSpPr>
@@ -7986,7 +8036,7 @@
       </p:sp>
       <p:sp>
         <p:nvSpPr>
-          <p:cNvPr id="20" name="Text 18"/>
+          <p:cNvPr id="21" name="Text 19"/>
           <p:cNvSpPr/>
           <p:nvPr/>
         </p:nvSpPr>
@@ -8025,32 +8075,47 @@
       </p:sp>
       <p:sp>
         <p:nvSpPr>
-          <p:cNvPr id="21" name="Shape 19"/>
-          <p:cNvSpPr/>
-          <p:nvPr/>
-        </p:nvSpPr>
-        <p:spPr>
-          <a:xfrm>
-            <a:off x="978408" y="3410712"/>
-            <a:ext cx="0" cy="73152"/>
-          </a:xfrm>
-          <a:prstGeom prst="line">
-            <a:avLst/>
-          </a:prstGeom>
-          <a:noFill/>
-          <a:ln w="12700">
-            <a:solidFill>
-              <a:srgbClr val="3B3E4A"/>
-            </a:solidFill>
-            <a:prstDash val="solid"/>
-            <a:headEnd type="none"/>
-            <a:tailEnd type="triangle"/>
-          </a:ln>
-        </p:spPr>
-      </p:sp>
-      <p:sp>
-        <p:nvSpPr>
           <p:cNvPr id="22" name="Shape 20"/>
+          <p:cNvSpPr/>
+          <p:nvPr/>
+        </p:nvSpPr>
+        <p:spPr>
+          <a:xfrm rot="-5400000">
+            <a:off x="973836" y="3399790"/>
+            <a:ext cx="9144" cy="12700"/>
+          </a:xfrm>
+          <a:prstGeom prst="rect">
+            <a:avLst/>
+          </a:prstGeom>
+          <a:solidFill>
+            <a:srgbClr val="3B3E4A"/>
+          </a:solidFill>
+          <a:ln/>
+        </p:spPr>
+      </p:sp>
+      <p:sp>
+        <p:nvSpPr>
+          <p:cNvPr id="23" name="Shape 21"/>
+          <p:cNvSpPr/>
+          <p:nvPr/>
+        </p:nvSpPr>
+        <p:spPr>
+          <a:xfrm rot="10800000">
+            <a:off x="920115" y="3346704"/>
+            <a:ext cx="116586" cy="137160"/>
+          </a:xfrm>
+          <a:prstGeom prst="triangle">
+            <a:avLst/>
+          </a:prstGeom>
+          <a:solidFill>
+            <a:srgbClr val="3B3E4A"/>
+          </a:solidFill>
+          <a:ln/>
+        </p:spPr>
+      </p:sp>
+      <p:sp>
+        <p:nvSpPr>
+          <p:cNvPr id="24" name="Shape 22"/>
           <p:cNvSpPr/>
           <p:nvPr/>
         </p:nvSpPr>
@@ -8077,7 +8142,7 @@
       </p:sp>
       <p:sp>
         <p:nvSpPr>
-          <p:cNvPr id="23" name="Shape 21"/>
+          <p:cNvPr id="25" name="Shape 23"/>
           <p:cNvSpPr/>
           <p:nvPr/>
         </p:nvSpPr>
@@ -8097,7 +8162,7 @@
       </p:sp>
       <p:sp>
         <p:nvSpPr>
-          <p:cNvPr id="24" name="Text 22"/>
+          <p:cNvPr id="26" name="Text 24"/>
           <p:cNvSpPr/>
           <p:nvPr/>
         </p:nvSpPr>
@@ -8136,7 +8201,7 @@
       </p:sp>
       <p:sp>
         <p:nvSpPr>
-          <p:cNvPr id="25" name="Text 23"/>
+          <p:cNvPr id="27" name="Text 25"/>
           <p:cNvSpPr/>
           <p:nvPr/>
         </p:nvSpPr>
@@ -8175,7 +8240,7 @@
       </p:sp>
       <p:sp>
         <p:nvSpPr>
-          <p:cNvPr id="26" name="Text 24"/>
+          <p:cNvPr id="28" name="Text 26"/>
           <p:cNvSpPr/>
           <p:nvPr/>
         </p:nvSpPr>
@@ -8214,32 +8279,47 @@
       </p:sp>
       <p:sp>
         <p:nvSpPr>
-          <p:cNvPr id="27" name="Shape 25"/>
-          <p:cNvSpPr/>
-          <p:nvPr/>
-        </p:nvSpPr>
-        <p:spPr>
-          <a:xfrm>
-            <a:off x="978408" y="4032504"/>
-            <a:ext cx="0" cy="73152"/>
-          </a:xfrm>
-          <a:prstGeom prst="line">
-            <a:avLst/>
-          </a:prstGeom>
-          <a:noFill/>
-          <a:ln w="12700">
-            <a:solidFill>
-              <a:srgbClr val="3B3E4A"/>
-            </a:solidFill>
-            <a:prstDash val="solid"/>
-            <a:headEnd type="none"/>
-            <a:tailEnd type="triangle"/>
-          </a:ln>
-        </p:spPr>
-      </p:sp>
-      <p:sp>
-        <p:nvSpPr>
-          <p:cNvPr id="28" name="Shape 26"/>
+          <p:cNvPr id="29" name="Shape 27"/>
+          <p:cNvSpPr/>
+          <p:nvPr/>
+        </p:nvSpPr>
+        <p:spPr>
+          <a:xfrm rot="-5400000">
+            <a:off x="973836" y="4021582"/>
+            <a:ext cx="9144" cy="12700"/>
+          </a:xfrm>
+          <a:prstGeom prst="rect">
+            <a:avLst/>
+          </a:prstGeom>
+          <a:solidFill>
+            <a:srgbClr val="3B3E4A"/>
+          </a:solidFill>
+          <a:ln/>
+        </p:spPr>
+      </p:sp>
+      <p:sp>
+        <p:nvSpPr>
+          <p:cNvPr id="30" name="Shape 28"/>
+          <p:cNvSpPr/>
+          <p:nvPr/>
+        </p:nvSpPr>
+        <p:spPr>
+          <a:xfrm rot="10800000">
+            <a:off x="920115" y="3968496"/>
+            <a:ext cx="116586" cy="137160"/>
+          </a:xfrm>
+          <a:prstGeom prst="triangle">
+            <a:avLst/>
+          </a:prstGeom>
+          <a:solidFill>
+            <a:srgbClr val="3B3E4A"/>
+          </a:solidFill>
+          <a:ln/>
+        </p:spPr>
+      </p:sp>
+      <p:sp>
+        <p:nvSpPr>
+          <p:cNvPr id="31" name="Shape 29"/>
           <p:cNvSpPr/>
           <p:nvPr/>
         </p:nvSpPr>
@@ -8266,7 +8346,7 @@
       </p:sp>
       <p:sp>
         <p:nvSpPr>
-          <p:cNvPr id="29" name="Shape 27"/>
+          <p:cNvPr id="32" name="Shape 30"/>
           <p:cNvSpPr/>
           <p:nvPr/>
         </p:nvSpPr>
@@ -8286,7 +8366,7 @@
       </p:sp>
       <p:sp>
         <p:nvSpPr>
-          <p:cNvPr id="30" name="Text 28"/>
+          <p:cNvPr id="33" name="Text 31"/>
           <p:cNvSpPr/>
           <p:nvPr/>
         </p:nvSpPr>
@@ -8325,7 +8405,7 @@
       </p:sp>
       <p:sp>
         <p:nvSpPr>
-          <p:cNvPr id="31" name="Text 29"/>
+          <p:cNvPr id="34" name="Text 32"/>
           <p:cNvSpPr/>
           <p:nvPr/>
         </p:nvSpPr>
@@ -8364,7 +8444,7 @@
       </p:sp>
       <p:sp>
         <p:nvSpPr>
-          <p:cNvPr id="32" name="Text 30"/>
+          <p:cNvPr id="35" name="Text 33"/>
           <p:cNvSpPr/>
           <p:nvPr/>
         </p:nvSpPr>
@@ -8403,32 +8483,47 @@
       </p:sp>
       <p:sp>
         <p:nvSpPr>
-          <p:cNvPr id="33" name="Shape 31"/>
-          <p:cNvSpPr/>
-          <p:nvPr/>
-        </p:nvSpPr>
-        <p:spPr>
-          <a:xfrm>
-            <a:off x="978408" y="4654296"/>
-            <a:ext cx="0" cy="73152"/>
-          </a:xfrm>
-          <a:prstGeom prst="line">
-            <a:avLst/>
-          </a:prstGeom>
-          <a:noFill/>
-          <a:ln w="12700">
-            <a:solidFill>
-              <a:srgbClr val="3B3E4A"/>
-            </a:solidFill>
-            <a:prstDash val="solid"/>
-            <a:headEnd type="none"/>
-            <a:tailEnd type="triangle"/>
-          </a:ln>
-        </p:spPr>
-      </p:sp>
-      <p:sp>
-        <p:nvSpPr>
-          <p:cNvPr id="34" name="Shape 32"/>
+          <p:cNvPr id="36" name="Shape 34"/>
+          <p:cNvSpPr/>
+          <p:nvPr/>
+        </p:nvSpPr>
+        <p:spPr>
+          <a:xfrm rot="-5400000">
+            <a:off x="973836" y="4643374"/>
+            <a:ext cx="9144" cy="12700"/>
+          </a:xfrm>
+          <a:prstGeom prst="rect">
+            <a:avLst/>
+          </a:prstGeom>
+          <a:solidFill>
+            <a:srgbClr val="3B3E4A"/>
+          </a:solidFill>
+          <a:ln/>
+        </p:spPr>
+      </p:sp>
+      <p:sp>
+        <p:nvSpPr>
+          <p:cNvPr id="37" name="Shape 35"/>
+          <p:cNvSpPr/>
+          <p:nvPr/>
+        </p:nvSpPr>
+        <p:spPr>
+          <a:xfrm rot="10800000">
+            <a:off x="920115" y="4590288"/>
+            <a:ext cx="116586" cy="137160"/>
+          </a:xfrm>
+          <a:prstGeom prst="triangle">
+            <a:avLst/>
+          </a:prstGeom>
+          <a:solidFill>
+            <a:srgbClr val="3B3E4A"/>
+          </a:solidFill>
+          <a:ln/>
+        </p:spPr>
+      </p:sp>
+      <p:sp>
+        <p:nvSpPr>
+          <p:cNvPr id="38" name="Shape 36"/>
           <p:cNvSpPr/>
           <p:nvPr/>
         </p:nvSpPr>
@@ -8455,7 +8550,7 @@
       </p:sp>
       <p:sp>
         <p:nvSpPr>
-          <p:cNvPr id="35" name="Shape 33"/>
+          <p:cNvPr id="39" name="Shape 37"/>
           <p:cNvSpPr/>
           <p:nvPr/>
         </p:nvSpPr>
@@ -8475,7 +8570,7 @@
       </p:sp>
       <p:sp>
         <p:nvSpPr>
-          <p:cNvPr id="36" name="Text 34"/>
+          <p:cNvPr id="40" name="Text 38"/>
           <p:cNvSpPr/>
           <p:nvPr/>
         </p:nvSpPr>
@@ -8514,7 +8609,7 @@
       </p:sp>
       <p:sp>
         <p:nvSpPr>
-          <p:cNvPr id="37" name="Text 35"/>
+          <p:cNvPr id="41" name="Text 39"/>
           <p:cNvSpPr/>
           <p:nvPr/>
         </p:nvSpPr>
@@ -8553,7 +8648,7 @@
       </p:sp>
       <p:sp>
         <p:nvSpPr>
-          <p:cNvPr id="38" name="Text 36"/>
+          <p:cNvPr id="42" name="Text 40"/>
           <p:cNvSpPr/>
           <p:nvPr/>
         </p:nvSpPr>
@@ -8592,32 +8687,47 @@
       </p:sp>
       <p:sp>
         <p:nvSpPr>
-          <p:cNvPr id="39" name="Shape 37"/>
-          <p:cNvSpPr/>
-          <p:nvPr/>
-        </p:nvSpPr>
-        <p:spPr>
-          <a:xfrm>
-            <a:off x="978408" y="5276088"/>
-            <a:ext cx="0" cy="73152"/>
-          </a:xfrm>
-          <a:prstGeom prst="line">
-            <a:avLst/>
-          </a:prstGeom>
-          <a:noFill/>
-          <a:ln w="12700">
-            <a:solidFill>
-              <a:srgbClr val="3B3E4A"/>
-            </a:solidFill>
-            <a:prstDash val="solid"/>
-            <a:headEnd type="none"/>
-            <a:tailEnd type="triangle"/>
-          </a:ln>
-        </p:spPr>
-      </p:sp>
-      <p:sp>
-        <p:nvSpPr>
-          <p:cNvPr id="40" name="Shape 38"/>
+          <p:cNvPr id="43" name="Shape 41"/>
+          <p:cNvSpPr/>
+          <p:nvPr/>
+        </p:nvSpPr>
+        <p:spPr>
+          <a:xfrm rot="-5400000">
+            <a:off x="973836" y="5265166"/>
+            <a:ext cx="9144" cy="12700"/>
+          </a:xfrm>
+          <a:prstGeom prst="rect">
+            <a:avLst/>
+          </a:prstGeom>
+          <a:solidFill>
+            <a:srgbClr val="3B3E4A"/>
+          </a:solidFill>
+          <a:ln/>
+        </p:spPr>
+      </p:sp>
+      <p:sp>
+        <p:nvSpPr>
+          <p:cNvPr id="44" name="Shape 42"/>
+          <p:cNvSpPr/>
+          <p:nvPr/>
+        </p:nvSpPr>
+        <p:spPr>
+          <a:xfrm rot="10800000">
+            <a:off x="920115" y="5212080"/>
+            <a:ext cx="116586" cy="137160"/>
+          </a:xfrm>
+          <a:prstGeom prst="triangle">
+            <a:avLst/>
+          </a:prstGeom>
+          <a:solidFill>
+            <a:srgbClr val="3B3E4A"/>
+          </a:solidFill>
+          <a:ln/>
+        </p:spPr>
+      </p:sp>
+      <p:sp>
+        <p:nvSpPr>
+          <p:cNvPr id="45" name="Shape 43"/>
           <p:cNvSpPr/>
           <p:nvPr/>
         </p:nvSpPr>
@@ -8644,7 +8754,7 @@
       </p:sp>
       <p:sp>
         <p:nvSpPr>
-          <p:cNvPr id="41" name="Shape 39"/>
+          <p:cNvPr id="46" name="Shape 44"/>
           <p:cNvSpPr/>
           <p:nvPr/>
         </p:nvSpPr>
@@ -8664,7 +8774,7 @@
       </p:sp>
       <p:sp>
         <p:nvSpPr>
-          <p:cNvPr id="42" name="Text 40"/>
+          <p:cNvPr id="47" name="Text 45"/>
           <p:cNvSpPr/>
           <p:nvPr/>
         </p:nvSpPr>
@@ -8703,7 +8813,7 @@
       </p:sp>
       <p:sp>
         <p:nvSpPr>
-          <p:cNvPr id="43" name="Text 41"/>
+          <p:cNvPr id="48" name="Text 46"/>
           <p:cNvSpPr/>
           <p:nvPr/>
         </p:nvSpPr>
@@ -8742,7 +8852,7 @@
       </p:sp>
       <p:sp>
         <p:nvSpPr>
-          <p:cNvPr id="44" name="Text 42"/>
+          <p:cNvPr id="49" name="Text 47"/>
           <p:cNvSpPr/>
           <p:nvPr/>
         </p:nvSpPr>
@@ -8959,21 +9069,16 @@
         </p:nvSpPr>
         <p:spPr>
           <a:xfrm>
-            <a:off x="640080" y="6419088"/>
-            <a:ext cx="10911535" cy="0"/>
-          </a:xfrm>
-          <a:prstGeom prst="line">
-            <a:avLst/>
-          </a:prstGeom>
-          <a:noFill/>
-          <a:ln w="9525">
-            <a:solidFill>
-              <a:srgbClr val="2A2C35"/>
-            </a:solidFill>
-            <a:prstDash val="solid"/>
-            <a:headEnd type="none"/>
-            <a:tailEnd type="none"/>
-          </a:ln>
+            <a:off x="640080" y="6413602"/>
+            <a:ext cx="10911535" cy="10973"/>
+          </a:xfrm>
+          <a:prstGeom prst="rect">
+            <a:avLst/>
+          </a:prstGeom>
+          <a:solidFill>
+            <a:srgbClr val="2A2C35"/>
+          </a:solidFill>
+          <a:ln/>
         </p:spPr>
       </p:sp>
       <p:sp>
@@ -9305,26 +9410,41 @@
         </p:nvSpPr>
         <p:spPr>
           <a:xfrm>
-            <a:off x="3972458" y="3840480"/>
-            <a:ext cx="457200" cy="0"/>
-          </a:xfrm>
-          <a:prstGeom prst="line">
-            <a:avLst/>
-          </a:prstGeom>
-          <a:noFill/>
-          <a:ln w="19050">
-            <a:solidFill>
-              <a:srgbClr val="9AA0AC"/>
-            </a:solidFill>
-            <a:prstDash val="solid"/>
-            <a:headEnd type="none"/>
-            <a:tailEnd type="triangle"/>
-          </a:ln>
+            <a:off x="3972458" y="3830955"/>
+            <a:ext cx="374904" cy="19050"/>
+          </a:xfrm>
+          <a:prstGeom prst="rect">
+            <a:avLst/>
+          </a:prstGeom>
+          <a:solidFill>
+            <a:srgbClr val="9AA0AC"/>
+          </a:solidFill>
+          <a:ln/>
         </p:spPr>
       </p:sp>
       <p:sp>
         <p:nvSpPr>
           <p:cNvPr id="15" name="Shape 13"/>
+          <p:cNvSpPr/>
+          <p:nvPr/>
+        </p:nvSpPr>
+        <p:spPr>
+          <a:xfrm rot="5400000">
+            <a:off x="4302785" y="3771900"/>
+            <a:ext cx="116586" cy="137160"/>
+          </a:xfrm>
+          <a:prstGeom prst="triangle">
+            <a:avLst/>
+          </a:prstGeom>
+          <a:solidFill>
+            <a:srgbClr val="9AA0AC"/>
+          </a:solidFill>
+          <a:ln/>
+        </p:spPr>
+      </p:sp>
+      <p:sp>
+        <p:nvSpPr>
+          <p:cNvPr id="16" name="Shape 14"/>
           <p:cNvSpPr/>
           <p:nvPr/>
         </p:nvSpPr>
@@ -9351,7 +9471,7 @@
       </p:sp>
       <p:sp>
         <p:nvSpPr>
-          <p:cNvPr id="16" name="Shape 14"/>
+          <p:cNvPr id="17" name="Shape 15"/>
           <p:cNvSpPr/>
           <p:nvPr/>
         </p:nvSpPr>
@@ -9371,7 +9491,7 @@
       </p:sp>
       <p:sp>
         <p:nvSpPr>
-          <p:cNvPr id="17" name="Text 15"/>
+          <p:cNvPr id="18" name="Text 16"/>
           <p:cNvSpPr/>
           <p:nvPr/>
         </p:nvSpPr>
@@ -9410,7 +9530,7 @@
       </p:sp>
       <p:sp>
         <p:nvSpPr>
-          <p:cNvPr id="18" name="Text 16"/>
+          <p:cNvPr id="19" name="Text 17"/>
           <p:cNvSpPr/>
           <p:nvPr/>
         </p:nvSpPr>
@@ -9528,32 +9648,47 @@
       </p:sp>
       <p:sp>
         <p:nvSpPr>
-          <p:cNvPr id="19" name="Shape 17"/>
-          <p:cNvSpPr/>
-          <p:nvPr/>
-        </p:nvSpPr>
-        <p:spPr>
-          <a:xfrm>
-            <a:off x="7762037" y="3840480"/>
-            <a:ext cx="457200" cy="0"/>
-          </a:xfrm>
-          <a:prstGeom prst="line">
-            <a:avLst/>
-          </a:prstGeom>
-          <a:noFill/>
-          <a:ln w="19050">
-            <a:solidFill>
-              <a:srgbClr val="9AA0AC"/>
-            </a:solidFill>
-            <a:prstDash val="solid"/>
-            <a:headEnd type="none"/>
-            <a:tailEnd type="triangle"/>
-          </a:ln>
-        </p:spPr>
-      </p:sp>
-      <p:sp>
-        <p:nvSpPr>
           <p:cNvPr id="20" name="Shape 18"/>
+          <p:cNvSpPr/>
+          <p:nvPr/>
+        </p:nvSpPr>
+        <p:spPr>
+          <a:xfrm>
+            <a:off x="7762037" y="3830955"/>
+            <a:ext cx="374904" cy="19050"/>
+          </a:xfrm>
+          <a:prstGeom prst="rect">
+            <a:avLst/>
+          </a:prstGeom>
+          <a:solidFill>
+            <a:srgbClr val="9AA0AC"/>
+          </a:solidFill>
+          <a:ln/>
+        </p:spPr>
+      </p:sp>
+      <p:sp>
+        <p:nvSpPr>
+          <p:cNvPr id="21" name="Shape 19"/>
+          <p:cNvSpPr/>
+          <p:nvPr/>
+        </p:nvSpPr>
+        <p:spPr>
+          <a:xfrm rot="5400000">
+            <a:off x="8092364" y="3771900"/>
+            <a:ext cx="116586" cy="137160"/>
+          </a:xfrm>
+          <a:prstGeom prst="triangle">
+            <a:avLst/>
+          </a:prstGeom>
+          <a:solidFill>
+            <a:srgbClr val="9AA0AC"/>
+          </a:solidFill>
+          <a:ln/>
+        </p:spPr>
+      </p:sp>
+      <p:sp>
+        <p:nvSpPr>
+          <p:cNvPr id="22" name="Shape 20"/>
           <p:cNvSpPr/>
           <p:nvPr/>
         </p:nvSpPr>
@@ -9580,7 +9715,7 @@
       </p:sp>
       <p:sp>
         <p:nvSpPr>
-          <p:cNvPr id="21" name="Shape 19"/>
+          <p:cNvPr id="23" name="Shape 21"/>
           <p:cNvSpPr/>
           <p:nvPr/>
         </p:nvSpPr>
@@ -9600,7 +9735,7 @@
       </p:sp>
       <p:sp>
         <p:nvSpPr>
-          <p:cNvPr id="22" name="Text 20"/>
+          <p:cNvPr id="24" name="Text 22"/>
           <p:cNvSpPr/>
           <p:nvPr/>
         </p:nvSpPr>
@@ -9639,7 +9774,7 @@
       </p:sp>
       <p:sp>
         <p:nvSpPr>
-          <p:cNvPr id="23" name="Text 21"/>
+          <p:cNvPr id="25" name="Text 23"/>
           <p:cNvSpPr/>
           <p:nvPr/>
         </p:nvSpPr>
@@ -10014,21 +10149,16 @@
         </p:nvSpPr>
         <p:spPr>
           <a:xfrm>
-            <a:off x="640080" y="6419088"/>
-            <a:ext cx="10911535" cy="0"/>
-          </a:xfrm>
-          <a:prstGeom prst="line">
-            <a:avLst/>
-          </a:prstGeom>
-          <a:noFill/>
-          <a:ln w="9525">
-            <a:solidFill>
-              <a:srgbClr val="2A2C35"/>
-            </a:solidFill>
-            <a:prstDash val="solid"/>
-            <a:headEnd type="none"/>
-            <a:tailEnd type="none"/>
-          </a:ln>
+            <a:off x="640080" y="6413602"/>
+            <a:ext cx="10911535" cy="10973"/>
+          </a:xfrm>
+          <a:prstGeom prst="rect">
+            <a:avLst/>
+          </a:prstGeom>
+          <a:solidFill>
+            <a:srgbClr val="2A2C35"/>
+          </a:solidFill>
+          <a:ln/>
         </p:spPr>
       </p:sp>
       <p:sp>
@@ -10289,21 +10419,16 @@
         </p:nvSpPr>
         <p:spPr>
           <a:xfrm>
-            <a:off x="640080" y="6419088"/>
-            <a:ext cx="10911535" cy="0"/>
-          </a:xfrm>
-          <a:prstGeom prst="line">
-            <a:avLst/>
-          </a:prstGeom>
-          <a:noFill/>
-          <a:ln w="9525">
-            <a:solidFill>
-              <a:srgbClr val="2A2C35"/>
-            </a:solidFill>
-            <a:prstDash val="solid"/>
-            <a:headEnd type="none"/>
-            <a:tailEnd type="none"/>
-          </a:ln>
+            <a:off x="640080" y="6413602"/>
+            <a:ext cx="10911535" cy="10973"/>
+          </a:xfrm>
+          <a:prstGeom prst="rect">
+            <a:avLst/>
+          </a:prstGeom>
+          <a:solidFill>
+            <a:srgbClr val="2A2C35"/>
+          </a:solidFill>
+          <a:ln/>
         </p:spPr>
       </p:sp>
       <p:sp>
@@ -11243,21 +11368,16 @@
         </p:nvSpPr>
         <p:spPr>
           <a:xfrm>
-            <a:off x="640080" y="6419088"/>
-            <a:ext cx="10911535" cy="0"/>
-          </a:xfrm>
-          <a:prstGeom prst="line">
-            <a:avLst/>
-          </a:prstGeom>
-          <a:noFill/>
-          <a:ln w="9525">
-            <a:solidFill>
-              <a:srgbClr val="2A2C35"/>
-            </a:solidFill>
-            <a:prstDash val="solid"/>
-            <a:headEnd type="none"/>
-            <a:tailEnd type="none"/>
-          </a:ln>
+            <a:off x="640080" y="6413602"/>
+            <a:ext cx="10911535" cy="10973"/>
+          </a:xfrm>
+          <a:prstGeom prst="rect">
+            <a:avLst/>
+          </a:prstGeom>
+          <a:solidFill>
+            <a:srgbClr val="2A2C35"/>
+          </a:solidFill>
+          <a:ln/>
         </p:spPr>
       </p:sp>
       <p:sp>
@@ -12715,21 +12835,16 @@
         </p:nvSpPr>
         <p:spPr>
           <a:xfrm>
-            <a:off x="640080" y="6419088"/>
-            <a:ext cx="10911535" cy="0"/>
-          </a:xfrm>
-          <a:prstGeom prst="line">
-            <a:avLst/>
-          </a:prstGeom>
-          <a:noFill/>
-          <a:ln w="9525">
-            <a:solidFill>
-              <a:srgbClr val="2A2C35"/>
-            </a:solidFill>
-            <a:prstDash val="solid"/>
-            <a:headEnd type="none"/>
-            <a:tailEnd type="none"/>
-          </a:ln>
+            <a:off x="640080" y="6413602"/>
+            <a:ext cx="10911535" cy="10973"/>
+          </a:xfrm>
+          <a:prstGeom prst="rect">
+            <a:avLst/>
+          </a:prstGeom>
+          <a:solidFill>
+            <a:srgbClr val="2A2C35"/>
+          </a:solidFill>
+          <a:ln/>
         </p:spPr>
       </p:sp>
       <p:sp>
@@ -12982,21 +13097,16 @@
         </p:nvSpPr>
         <p:spPr>
           <a:xfrm>
-            <a:off x="640080" y="2532888"/>
-            <a:ext cx="2788920" cy="0"/>
-          </a:xfrm>
-          <a:prstGeom prst="line">
-            <a:avLst/>
-          </a:prstGeom>
-          <a:noFill/>
-          <a:ln w="12700">
-            <a:solidFill>
-              <a:srgbClr val="5B8CFF"/>
-            </a:solidFill>
-            <a:prstDash val="solid"/>
-            <a:headEnd type="none"/>
-            <a:tailEnd type="none"/>
-          </a:ln>
+            <a:off x="640080" y="2526538"/>
+            <a:ext cx="2788920" cy="12700"/>
+          </a:xfrm>
+          <a:prstGeom prst="rect">
+            <a:avLst/>
+          </a:prstGeom>
+          <a:solidFill>
+            <a:srgbClr val="5B8CFF"/>
+          </a:solidFill>
+          <a:ln/>
         </p:spPr>
       </p:sp>
       <p:sp>
@@ -13069,21 +13179,16 @@
         </p:nvSpPr>
         <p:spPr>
           <a:xfrm>
-            <a:off x="640080" y="3026664"/>
-            <a:ext cx="2788920" cy="0"/>
-          </a:xfrm>
-          <a:prstGeom prst="line">
-            <a:avLst/>
-          </a:prstGeom>
-          <a:noFill/>
-          <a:ln w="12700">
-            <a:solidFill>
-              <a:srgbClr val="5B8CFF"/>
-            </a:solidFill>
-            <a:prstDash val="solid"/>
-            <a:headEnd type="none"/>
-            <a:tailEnd type="none"/>
-          </a:ln>
+            <a:off x="640080" y="3020314"/>
+            <a:ext cx="2788920" cy="12700"/>
+          </a:xfrm>
+          <a:prstGeom prst="rect">
+            <a:avLst/>
+          </a:prstGeom>
+          <a:solidFill>
+            <a:srgbClr val="5B8CFF"/>
+          </a:solidFill>
+          <a:ln/>
         </p:spPr>
       </p:sp>
       <p:sp>
@@ -13281,21 +13386,16 @@
         </p:nvSpPr>
         <p:spPr>
           <a:xfrm>
-            <a:off x="640080" y="4544568"/>
-            <a:ext cx="2788920" cy="0"/>
-          </a:xfrm>
-          <a:prstGeom prst="line">
-            <a:avLst/>
-          </a:prstGeom>
-          <a:noFill/>
-          <a:ln w="12700">
-            <a:solidFill>
-              <a:srgbClr val="5B8CFF"/>
-            </a:solidFill>
-            <a:prstDash val="solid"/>
-            <a:headEnd type="none"/>
-            <a:tailEnd type="none"/>
-          </a:ln>
+            <a:off x="640080" y="4538218"/>
+            <a:ext cx="2788920" cy="12700"/>
+          </a:xfrm>
+          <a:prstGeom prst="rect">
+            <a:avLst/>
+          </a:prstGeom>
+          <a:solidFill>
+            <a:srgbClr val="5B8CFF"/>
+          </a:solidFill>
+          <a:ln/>
         </p:spPr>
       </p:sp>
       <p:sp>
@@ -13368,21 +13468,16 @@
         </p:nvSpPr>
         <p:spPr>
           <a:xfrm>
-            <a:off x="640080" y="5038344"/>
-            <a:ext cx="2788920" cy="0"/>
-          </a:xfrm>
-          <a:prstGeom prst="line">
-            <a:avLst/>
-          </a:prstGeom>
-          <a:noFill/>
-          <a:ln w="12700">
-            <a:solidFill>
-              <a:srgbClr val="5B8CFF"/>
-            </a:solidFill>
-            <a:prstDash val="solid"/>
-            <a:headEnd type="none"/>
-            <a:tailEnd type="none"/>
-          </a:ln>
+            <a:off x="640080" y="5031994"/>
+            <a:ext cx="2788920" cy="12700"/>
+          </a:xfrm>
+          <a:prstGeom prst="rect">
+            <a:avLst/>
+          </a:prstGeom>
+          <a:solidFill>
+            <a:srgbClr val="5B8CFF"/>
+          </a:solidFill>
+          <a:ln/>
         </p:spPr>
       </p:sp>
       <p:sp>
@@ -13580,21 +13675,16 @@
         </p:nvSpPr>
         <p:spPr>
           <a:xfrm>
-            <a:off x="4343400" y="2532888"/>
-            <a:ext cx="2788920" cy="0"/>
-          </a:xfrm>
-          <a:prstGeom prst="line">
-            <a:avLst/>
-          </a:prstGeom>
-          <a:noFill/>
-          <a:ln w="12700">
-            <a:solidFill>
-              <a:srgbClr val="A78BFA"/>
-            </a:solidFill>
-            <a:prstDash val="solid"/>
-            <a:headEnd type="none"/>
-            <a:tailEnd type="none"/>
-          </a:ln>
+            <a:off x="4343400" y="2526538"/>
+            <a:ext cx="2788920" cy="12700"/>
+          </a:xfrm>
+          <a:prstGeom prst="rect">
+            <a:avLst/>
+          </a:prstGeom>
+          <a:solidFill>
+            <a:srgbClr val="A78BFA"/>
+          </a:solidFill>
+          <a:ln/>
         </p:spPr>
       </p:sp>
       <p:sp>
@@ -13667,21 +13757,16 @@
         </p:nvSpPr>
         <p:spPr>
           <a:xfrm>
-            <a:off x="4343400" y="3026664"/>
-            <a:ext cx="2788920" cy="0"/>
-          </a:xfrm>
-          <a:prstGeom prst="line">
-            <a:avLst/>
-          </a:prstGeom>
-          <a:noFill/>
-          <a:ln w="12700">
-            <a:solidFill>
-              <a:srgbClr val="A78BFA"/>
-            </a:solidFill>
-            <a:prstDash val="solid"/>
-            <a:headEnd type="none"/>
-            <a:tailEnd type="none"/>
-          </a:ln>
+            <a:off x="4343400" y="3020314"/>
+            <a:ext cx="2788920" cy="12700"/>
+          </a:xfrm>
+          <a:prstGeom prst="rect">
+            <a:avLst/>
+          </a:prstGeom>
+          <a:solidFill>
+            <a:srgbClr val="A78BFA"/>
+          </a:solidFill>
+          <a:ln/>
         </p:spPr>
       </p:sp>
       <p:sp>
@@ -13879,21 +13964,16 @@
         </p:nvSpPr>
         <p:spPr>
           <a:xfrm>
-            <a:off x="4343400" y="4544568"/>
-            <a:ext cx="2788920" cy="0"/>
-          </a:xfrm>
-          <a:prstGeom prst="line">
-            <a:avLst/>
-          </a:prstGeom>
-          <a:noFill/>
-          <a:ln w="12700">
-            <a:solidFill>
-              <a:srgbClr val="A78BFA"/>
-            </a:solidFill>
-            <a:prstDash val="solid"/>
-            <a:headEnd type="none"/>
-            <a:tailEnd type="none"/>
-          </a:ln>
+            <a:off x="4343400" y="4538218"/>
+            <a:ext cx="2788920" cy="12700"/>
+          </a:xfrm>
+          <a:prstGeom prst="rect">
+            <a:avLst/>
+          </a:prstGeom>
+          <a:solidFill>
+            <a:srgbClr val="A78BFA"/>
+          </a:solidFill>
+          <a:ln/>
         </p:spPr>
       </p:sp>
       <p:sp>
@@ -13966,21 +14046,16 @@
         </p:nvSpPr>
         <p:spPr>
           <a:xfrm>
-            <a:off x="4343400" y="5038344"/>
-            <a:ext cx="2788920" cy="0"/>
-          </a:xfrm>
-          <a:prstGeom prst="line">
-            <a:avLst/>
-          </a:prstGeom>
-          <a:noFill/>
-          <a:ln w="12700">
-            <a:solidFill>
-              <a:srgbClr val="A78BFA"/>
-            </a:solidFill>
-            <a:prstDash val="solid"/>
-            <a:headEnd type="none"/>
-            <a:tailEnd type="none"/>
-          </a:ln>
+            <a:off x="4343400" y="5031994"/>
+            <a:ext cx="2788920" cy="12700"/>
+          </a:xfrm>
+          <a:prstGeom prst="rect">
+            <a:avLst/>
+          </a:prstGeom>
+          <a:solidFill>
+            <a:srgbClr val="A78BFA"/>
+          </a:solidFill>
+          <a:ln/>
         </p:spPr>
       </p:sp>
       <p:sp>
@@ -14158,21 +14233,16 @@
         </p:nvSpPr>
         <p:spPr>
           <a:xfrm>
-            <a:off x="8275320" y="2532888"/>
-            <a:ext cx="2880360" cy="0"/>
-          </a:xfrm>
-          <a:prstGeom prst="line">
-            <a:avLst/>
-          </a:prstGeom>
-          <a:noFill/>
-          <a:ln w="12700">
-            <a:solidFill>
-              <a:srgbClr val="2DD4A7"/>
-            </a:solidFill>
-            <a:prstDash val="solid"/>
-            <a:headEnd type="none"/>
-            <a:tailEnd type="none"/>
-          </a:ln>
+            <a:off x="8275320" y="2526538"/>
+            <a:ext cx="2880360" cy="12700"/>
+          </a:xfrm>
+          <a:prstGeom prst="rect">
+            <a:avLst/>
+          </a:prstGeom>
+          <a:solidFill>
+            <a:srgbClr val="2DD4A7"/>
+          </a:solidFill>
+          <a:ln/>
         </p:spPr>
       </p:sp>
       <p:sp>
@@ -14370,21 +14440,16 @@
         </p:nvSpPr>
         <p:spPr>
           <a:xfrm>
-            <a:off x="8275320" y="4178808"/>
-            <a:ext cx="2880360" cy="0"/>
-          </a:xfrm>
-          <a:prstGeom prst="line">
-            <a:avLst/>
-          </a:prstGeom>
-          <a:noFill/>
-          <a:ln w="12700">
-            <a:solidFill>
-              <a:srgbClr val="2DD4A7"/>
-            </a:solidFill>
-            <a:prstDash val="solid"/>
-            <a:headEnd type="none"/>
-            <a:tailEnd type="none"/>
-          </a:ln>
+            <a:off x="8275320" y="4172458"/>
+            <a:ext cx="2880360" cy="12700"/>
+          </a:xfrm>
+          <a:prstGeom prst="rect">
+            <a:avLst/>
+          </a:prstGeom>
+          <a:solidFill>
+            <a:srgbClr val="2DD4A7"/>
+          </a:solidFill>
+          <a:ln/>
         </p:spPr>
       </p:sp>
       <p:sp>
@@ -14457,21 +14522,16 @@
         </p:nvSpPr>
         <p:spPr>
           <a:xfrm>
-            <a:off x="8275320" y="4672584"/>
-            <a:ext cx="2880360" cy="0"/>
-          </a:xfrm>
-          <a:prstGeom prst="line">
-            <a:avLst/>
-          </a:prstGeom>
-          <a:noFill/>
-          <a:ln w="12700">
-            <a:solidFill>
-              <a:srgbClr val="2DD4A7"/>
-            </a:solidFill>
-            <a:prstDash val="solid"/>
-            <a:headEnd type="none"/>
-            <a:tailEnd type="none"/>
-          </a:ln>
+            <a:off x="8275320" y="4666234"/>
+            <a:ext cx="2880360" cy="12700"/>
+          </a:xfrm>
+          <a:prstGeom prst="rect">
+            <a:avLst/>
+          </a:prstGeom>
+          <a:solidFill>
+            <a:srgbClr val="2DD4A7"/>
+          </a:solidFill>
+          <a:ln/>
         </p:spPr>
       </p:sp>
       <p:sp>
@@ -14523,22 +14583,17 @@
           <p:nvPr/>
         </p:nvSpPr>
         <p:spPr>
-          <a:xfrm>
-            <a:off x="2011680" y="4160520"/>
-            <a:ext cx="0" cy="-457200"/>
-          </a:xfrm>
-          <a:prstGeom prst="line">
-            <a:avLst/>
-          </a:prstGeom>
-          <a:noFill/>
-          <a:ln w="15875">
-            <a:solidFill>
-              <a:srgbClr val="3B3E4A"/>
-            </a:solidFill>
-            <a:prstDash val="solid"/>
-            <a:headEnd type="none"/>
-            <a:tailEnd type="triangle"/>
-          </a:ln>
+          <a:xfrm rot="-5400000">
+            <a:off x="1824228" y="3965131"/>
+            <a:ext cx="374904" cy="15875"/>
+          </a:xfrm>
+          <a:prstGeom prst="rect">
+            <a:avLst/>
+          </a:prstGeom>
+          <a:solidFill>
+            <a:srgbClr val="3B3E4A"/>
+          </a:solidFill>
+          <a:ln/>
         </p:spPr>
       </p:sp>
       <p:sp>
@@ -14549,21 +14604,16 @@
         </p:nvSpPr>
         <p:spPr>
           <a:xfrm>
-            <a:off x="2788920" y="2743200"/>
-            <a:ext cx="1554480" cy="365760"/>
-          </a:xfrm>
-          <a:prstGeom prst="line">
-            <a:avLst/>
-          </a:prstGeom>
-          <a:noFill/>
-          <a:ln w="15875">
-            <a:solidFill>
-              <a:srgbClr val="3B3E4A"/>
-            </a:solidFill>
-            <a:prstDash val="solid"/>
-            <a:headEnd type="none"/>
-            <a:tailEnd type="triangle"/>
-          </a:ln>
+            <a:off x="1953387" y="3703320"/>
+            <a:ext cx="116586" cy="137160"/>
+          </a:xfrm>
+          <a:prstGeom prst="triangle">
+            <a:avLst/>
+          </a:prstGeom>
+          <a:solidFill>
+            <a:srgbClr val="3B3E4A"/>
+          </a:solidFill>
+          <a:ln/>
         </p:spPr>
       </p:sp>
       <p:sp>
@@ -14573,22 +14623,17 @@
           <p:nvPr/>
         </p:nvSpPr>
         <p:spPr>
-          <a:xfrm>
-            <a:off x="2788920" y="4846320"/>
-            <a:ext cx="1554480" cy="91440"/>
-          </a:xfrm>
-          <a:prstGeom prst="line">
-            <a:avLst/>
-          </a:prstGeom>
-          <a:noFill/>
-          <a:ln w="15875">
-            <a:solidFill>
-              <a:srgbClr val="3B3E4A"/>
-            </a:solidFill>
-            <a:prstDash val="solid"/>
-            <a:headEnd type="none"/>
-            <a:tailEnd type="triangle"/>
-          </a:ln>
+          <a:xfrm rot="794431">
+            <a:off x="2768788" y="2908718"/>
+            <a:ext cx="1514635" cy="15875"/>
+          </a:xfrm>
+          <a:prstGeom prst="rect">
+            <a:avLst/>
+          </a:prstGeom>
+          <a:solidFill>
+            <a:srgbClr val="3B3E4A"/>
+          </a:solidFill>
+          <a:ln/>
         </p:spPr>
       </p:sp>
       <p:sp>
@@ -14598,22 +14643,17 @@
           <p:nvPr/>
         </p:nvSpPr>
         <p:spPr>
-          <a:xfrm>
-            <a:off x="2788920" y="4480560"/>
-            <a:ext cx="5486400" cy="-1463040"/>
-          </a:xfrm>
-          <a:prstGeom prst="line">
-            <a:avLst/>
-          </a:prstGeom>
-          <a:noFill/>
-          <a:ln w="15875">
-            <a:solidFill>
-              <a:srgbClr val="2DD4A7"/>
-            </a:solidFill>
-            <a:prstDash val="solid"/>
-            <a:headEnd type="none"/>
-            <a:tailEnd type="triangle"/>
-          </a:ln>
+          <a:xfrm rot="6194431">
+            <a:off x="4218350" y="3024672"/>
+            <a:ext cx="116586" cy="137160"/>
+          </a:xfrm>
+          <a:prstGeom prst="triangle">
+            <a:avLst/>
+          </a:prstGeom>
+          <a:solidFill>
+            <a:srgbClr val="3B3E4A"/>
+          </a:solidFill>
+          <a:ln/>
         </p:spPr>
       </p:sp>
       <p:sp>
@@ -14623,22 +14663,117 @@
           <p:nvPr/>
         </p:nvSpPr>
         <p:spPr>
-          <a:xfrm>
-            <a:off x="9692640" y="3794760"/>
-            <a:ext cx="0" cy="-484632"/>
-          </a:xfrm>
-          <a:prstGeom prst="line">
-            <a:avLst/>
-          </a:prstGeom>
-          <a:noFill/>
-          <a:ln w="15875">
-            <a:solidFill>
-              <a:srgbClr val="3B3E4A"/>
-            </a:solidFill>
-            <a:prstDash val="solid"/>
-            <a:headEnd type="none"/>
-            <a:tailEnd type="triangle"/>
-          </a:ln>
+          <a:xfrm rot="201988">
+            <a:off x="2787647" y="4881686"/>
+            <a:ext cx="1474871" cy="15875"/>
+          </a:xfrm>
+          <a:prstGeom prst="rect">
+            <a:avLst/>
+          </a:prstGeom>
+          <a:solidFill>
+            <a:srgbClr val="3B3E4A"/>
+          </a:solidFill>
+          <a:ln/>
+        </p:spPr>
+      </p:sp>
+      <p:sp>
+        <p:nvSpPr>
+          <p:cNvPr id="61" name="Shape 59"/>
+          <p:cNvSpPr/>
+          <p:nvPr/>
+        </p:nvSpPr>
+        <p:spPr>
+          <a:xfrm rot="5601988">
+            <a:off x="4216645" y="4865153"/>
+            <a:ext cx="116586" cy="137160"/>
+          </a:xfrm>
+          <a:prstGeom prst="triangle">
+            <a:avLst/>
+          </a:prstGeom>
+          <a:solidFill>
+            <a:srgbClr val="3B3E4A"/>
+          </a:solidFill>
+          <a:ln/>
+        </p:spPr>
+      </p:sp>
+      <p:sp>
+        <p:nvSpPr>
+          <p:cNvPr id="62" name="Shape 60"/>
+          <p:cNvSpPr/>
+          <p:nvPr/>
+        </p:nvSpPr>
+        <p:spPr>
+          <a:xfrm rot="-895885">
+            <a:off x="2694448" y="3751705"/>
+            <a:ext cx="5595826" cy="15875"/>
+          </a:xfrm>
+          <a:prstGeom prst="rect">
+            <a:avLst/>
+          </a:prstGeom>
+          <a:solidFill>
+            <a:srgbClr val="2DD4A7"/>
+          </a:solidFill>
+          <a:ln/>
+        </p:spPr>
+      </p:sp>
+      <p:sp>
+        <p:nvSpPr>
+          <p:cNvPr id="63" name="Shape 61"/>
+          <p:cNvSpPr/>
+          <p:nvPr/>
+        </p:nvSpPr>
+        <p:spPr>
+          <a:xfrm rot="4504115">
+            <a:off x="8150763" y="2966611"/>
+            <a:ext cx="116586" cy="137160"/>
+          </a:xfrm>
+          <a:prstGeom prst="triangle">
+            <a:avLst/>
+          </a:prstGeom>
+          <a:solidFill>
+            <a:srgbClr val="2DD4A7"/>
+          </a:solidFill>
+          <a:ln/>
+        </p:spPr>
+      </p:sp>
+      <p:sp>
+        <p:nvSpPr>
+          <p:cNvPr id="64" name="Shape 62"/>
+          <p:cNvSpPr/>
+          <p:nvPr/>
+        </p:nvSpPr>
+        <p:spPr>
+          <a:xfrm rot="-5400000">
+            <a:off x="9491472" y="3585655"/>
+            <a:ext cx="402336" cy="15875"/>
+          </a:xfrm>
+          <a:prstGeom prst="rect">
+            <a:avLst/>
+          </a:prstGeom>
+          <a:solidFill>
+            <a:srgbClr val="3B3E4A"/>
+          </a:solidFill>
+          <a:ln/>
+        </p:spPr>
+      </p:sp>
+      <p:sp>
+        <p:nvSpPr>
+          <p:cNvPr id="65" name="Shape 63"/>
+          <p:cNvSpPr/>
+          <p:nvPr/>
+        </p:nvSpPr>
+        <p:spPr>
+          <a:xfrm>
+            <a:off x="9634347" y="3310128"/>
+            <a:ext cx="116586" cy="137160"/>
+          </a:xfrm>
+          <a:prstGeom prst="triangle">
+            <a:avLst/>
+          </a:prstGeom>
+          <a:solidFill>
+            <a:srgbClr val="3B3E4A"/>
+          </a:solidFill>
+          <a:ln/>
         </p:spPr>
       </p:sp>
     </p:spTree>
@@ -14821,21 +14956,16 @@
         </p:nvSpPr>
         <p:spPr>
           <a:xfrm>
-            <a:off x="640080" y="6419088"/>
-            <a:ext cx="10911535" cy="0"/>
-          </a:xfrm>
-          <a:prstGeom prst="line">
-            <a:avLst/>
-          </a:prstGeom>
-          <a:noFill/>
-          <a:ln w="9525">
-            <a:solidFill>
-              <a:srgbClr val="2A2C35"/>
-            </a:solidFill>
-            <a:prstDash val="solid"/>
-            <a:headEnd type="none"/>
-            <a:tailEnd type="none"/>
-          </a:ln>
+            <a:off x="640080" y="6413602"/>
+            <a:ext cx="10911535" cy="10973"/>
+          </a:xfrm>
+          <a:prstGeom prst="rect">
+            <a:avLst/>
+          </a:prstGeom>
+          <a:solidFill>
+            <a:srgbClr val="2A2C35"/>
+          </a:solidFill>
+          <a:ln/>
         </p:spPr>
       </p:sp>
       <p:sp>
@@ -15911,21 +16041,16 @@
         </p:nvSpPr>
         <p:spPr>
           <a:xfrm>
-            <a:off x="640080" y="6419088"/>
-            <a:ext cx="10911535" cy="0"/>
-          </a:xfrm>
-          <a:prstGeom prst="line">
-            <a:avLst/>
-          </a:prstGeom>
-          <a:noFill/>
-          <a:ln w="9525">
-            <a:solidFill>
-              <a:srgbClr val="2A2C35"/>
-            </a:solidFill>
-            <a:prstDash val="solid"/>
-            <a:headEnd type="none"/>
-            <a:tailEnd type="none"/>
-          </a:ln>
+            <a:off x="640080" y="6413602"/>
+            <a:ext cx="10911535" cy="10973"/>
+          </a:xfrm>
+          <a:prstGeom prst="rect">
+            <a:avLst/>
+          </a:prstGeom>
+          <a:solidFill>
+            <a:srgbClr val="2A2C35"/>
+          </a:solidFill>
+          <a:ln/>
         </p:spPr>
       </p:sp>
       <p:sp>
@@ -17168,27 +17293,42 @@
           <p:nvPr/>
         </p:nvSpPr>
         <p:spPr>
-          <a:xfrm>
-            <a:off x="5577840" y="2788920"/>
-            <a:ext cx="-1554480" cy="411480"/>
-          </a:xfrm>
-          <a:prstGeom prst="line">
-            <a:avLst/>
-          </a:prstGeom>
-          <a:noFill/>
-          <a:ln w="15875">
-            <a:solidFill>
-              <a:srgbClr val="3B3E4A"/>
-            </a:solidFill>
-            <a:prstDash val="solid"/>
-            <a:headEnd type="none"/>
-            <a:tailEnd type="triangle"/>
-          </a:ln>
-        </p:spPr>
-      </p:sp>
-      <p:sp>
-        <p:nvSpPr>
-          <p:cNvPr id="46" name="Text 44"/>
+          <a:xfrm rot="9910411">
+            <a:off x="4077517" y="2976193"/>
+            <a:ext cx="1525723" cy="15875"/>
+          </a:xfrm>
+          <a:prstGeom prst="rect">
+            <a:avLst/>
+          </a:prstGeom>
+          <a:solidFill>
+            <a:srgbClr val="3B3E4A"/>
+          </a:solidFill>
+          <a:ln/>
+        </p:spPr>
+      </p:sp>
+      <p:sp>
+        <p:nvSpPr>
+          <p:cNvPr id="46" name="Shape 44"/>
+          <p:cNvSpPr/>
+          <p:nvPr/>
+        </p:nvSpPr>
+        <p:spPr>
+          <a:xfrm rot="15310411">
+            <a:off x="4031364" y="3114271"/>
+            <a:ext cx="116586" cy="137160"/>
+          </a:xfrm>
+          <a:prstGeom prst="triangle">
+            <a:avLst/>
+          </a:prstGeom>
+          <a:solidFill>
+            <a:srgbClr val="3B3E4A"/>
+          </a:solidFill>
+          <a:ln/>
+        </p:spPr>
+      </p:sp>
+      <p:sp>
+        <p:nvSpPr>
+          <p:cNvPr id="47" name="Text 45"/>
           <p:cNvSpPr/>
           <p:nvPr/>
         </p:nvSpPr>
@@ -17227,32 +17367,47 @@
       </p:sp>
       <p:sp>
         <p:nvSpPr>
-          <p:cNvPr id="47" name="Shape 45"/>
-          <p:cNvSpPr/>
-          <p:nvPr/>
-        </p:nvSpPr>
-        <p:spPr>
-          <a:xfrm>
-            <a:off x="6099048" y="2788920"/>
-            <a:ext cx="0" cy="411480"/>
-          </a:xfrm>
-          <a:prstGeom prst="line">
-            <a:avLst/>
-          </a:prstGeom>
-          <a:noFill/>
-          <a:ln w="15875">
-            <a:solidFill>
-              <a:srgbClr val="3B3E4A"/>
-            </a:solidFill>
-            <a:prstDash val="solid"/>
-            <a:headEnd type="none"/>
-            <a:tailEnd type="triangle"/>
-          </a:ln>
-        </p:spPr>
-      </p:sp>
-      <p:sp>
-        <p:nvSpPr>
-          <p:cNvPr id="48" name="Text 46"/>
+          <p:cNvPr id="48" name="Shape 46"/>
+          <p:cNvSpPr/>
+          <p:nvPr/>
+        </p:nvSpPr>
+        <p:spPr>
+          <a:xfrm rot="5400000">
+            <a:off x="5934456" y="2945575"/>
+            <a:ext cx="329184" cy="15875"/>
+          </a:xfrm>
+          <a:prstGeom prst="rect">
+            <a:avLst/>
+          </a:prstGeom>
+          <a:solidFill>
+            <a:srgbClr val="3B3E4A"/>
+          </a:solidFill>
+          <a:ln/>
+        </p:spPr>
+      </p:sp>
+      <p:sp>
+        <p:nvSpPr>
+          <p:cNvPr id="49" name="Shape 47"/>
+          <p:cNvSpPr/>
+          <p:nvPr/>
+        </p:nvSpPr>
+        <p:spPr>
+          <a:xfrm rot="10800000">
+            <a:off x="6040755" y="3063240"/>
+            <a:ext cx="116586" cy="137160"/>
+          </a:xfrm>
+          <a:prstGeom prst="triangle">
+            <a:avLst/>
+          </a:prstGeom>
+          <a:solidFill>
+            <a:srgbClr val="3B3E4A"/>
+          </a:solidFill>
+          <a:ln/>
+        </p:spPr>
+      </p:sp>
+      <p:sp>
+        <p:nvSpPr>
+          <p:cNvPr id="50" name="Text 48"/>
           <p:cNvSpPr/>
           <p:nvPr/>
         </p:nvSpPr>
@@ -17291,27 +17446,42 @@
       </p:sp>
       <p:sp>
         <p:nvSpPr>
-          <p:cNvPr id="49" name="Shape 47"/>
-          <p:cNvSpPr/>
-          <p:nvPr/>
-        </p:nvSpPr>
-        <p:spPr>
-          <a:xfrm>
-            <a:off x="7315200" y="4297680"/>
-            <a:ext cx="1188720" cy="0"/>
-          </a:xfrm>
-          <a:prstGeom prst="line">
-            <a:avLst/>
-          </a:prstGeom>
-          <a:noFill/>
-          <a:ln w="15875">
-            <a:solidFill>
-              <a:srgbClr val="3B3E4A"/>
-            </a:solidFill>
-            <a:prstDash val="solid"/>
-            <a:headEnd type="none"/>
-            <a:tailEnd type="triangle"/>
-          </a:ln>
+          <p:cNvPr id="51" name="Shape 49"/>
+          <p:cNvSpPr/>
+          <p:nvPr/>
+        </p:nvSpPr>
+        <p:spPr>
+          <a:xfrm>
+            <a:off x="7315200" y="4289743"/>
+            <a:ext cx="1106424" cy="15875"/>
+          </a:xfrm>
+          <a:prstGeom prst="rect">
+            <a:avLst/>
+          </a:prstGeom>
+          <a:solidFill>
+            <a:srgbClr val="3B3E4A"/>
+          </a:solidFill>
+          <a:ln/>
+        </p:spPr>
+      </p:sp>
+      <p:sp>
+        <p:nvSpPr>
+          <p:cNvPr id="52" name="Shape 50"/>
+          <p:cNvSpPr/>
+          <p:nvPr/>
+        </p:nvSpPr>
+        <p:spPr>
+          <a:xfrm rot="5400000">
+            <a:off x="8377047" y="4229100"/>
+            <a:ext cx="116586" cy="137160"/>
+          </a:xfrm>
+          <a:prstGeom prst="triangle">
+            <a:avLst/>
+          </a:prstGeom>
+          <a:solidFill>
+            <a:srgbClr val="3B3E4A"/>
+          </a:solidFill>
+          <a:ln/>
         </p:spPr>
       </p:sp>
     </p:spTree>
@@ -17494,21 +17664,16 @@
         </p:nvSpPr>
         <p:spPr>
           <a:xfrm>
-            <a:off x="640080" y="6419088"/>
-            <a:ext cx="10911535" cy="0"/>
-          </a:xfrm>
-          <a:prstGeom prst="line">
-            <a:avLst/>
-          </a:prstGeom>
-          <a:noFill/>
-          <a:ln w="9525">
-            <a:solidFill>
-              <a:srgbClr val="2A2C35"/>
-            </a:solidFill>
-            <a:prstDash val="solid"/>
-            <a:headEnd type="none"/>
-            <a:tailEnd type="none"/>
-          </a:ln>
+            <a:off x="640080" y="6413602"/>
+            <a:ext cx="10911535" cy="10973"/>
+          </a:xfrm>
+          <a:prstGeom prst="rect">
+            <a:avLst/>
+          </a:prstGeom>
+          <a:solidFill>
+            <a:srgbClr val="2A2C35"/>
+          </a:solidFill>
+          <a:ln/>
         </p:spPr>
       </p:sp>
       <p:sp>
@@ -18978,21 +19143,16 @@
         </p:nvSpPr>
         <p:spPr>
           <a:xfrm>
-            <a:off x="640080" y="6419088"/>
-            <a:ext cx="10911535" cy="0"/>
-          </a:xfrm>
-          <a:prstGeom prst="line">
-            <a:avLst/>
-          </a:prstGeom>
-          <a:noFill/>
-          <a:ln w="9525">
-            <a:solidFill>
-              <a:srgbClr val="2A2C35"/>
-            </a:solidFill>
-            <a:prstDash val="solid"/>
-            <a:headEnd type="none"/>
-            <a:tailEnd type="none"/>
-          </a:ln>
+            <a:off x="640080" y="6413602"/>
+            <a:ext cx="10911535" cy="10973"/>
+          </a:xfrm>
+          <a:prstGeom prst="rect">
+            <a:avLst/>
+          </a:prstGeom>
+          <a:solidFill>
+            <a:srgbClr val="2A2C35"/>
+          </a:solidFill>
+          <a:ln/>
         </p:spPr>
       </p:sp>
       <p:sp>
@@ -19679,21 +19839,16 @@
         </p:nvSpPr>
         <p:spPr>
           <a:xfrm>
-            <a:off x="640080" y="6419088"/>
-            <a:ext cx="10911535" cy="0"/>
-          </a:xfrm>
-          <a:prstGeom prst="line">
-            <a:avLst/>
-          </a:prstGeom>
-          <a:noFill/>
-          <a:ln w="9525">
-            <a:solidFill>
-              <a:srgbClr val="2A2C35"/>
-            </a:solidFill>
-            <a:prstDash val="solid"/>
-            <a:headEnd type="none"/>
-            <a:tailEnd type="none"/>
-          </a:ln>
+            <a:off x="640080" y="6413602"/>
+            <a:ext cx="10911535" cy="10973"/>
+          </a:xfrm>
+          <a:prstGeom prst="rect">
+            <a:avLst/>
+          </a:prstGeom>
+          <a:solidFill>
+            <a:srgbClr val="2A2C35"/>
+          </a:solidFill>
+          <a:ln/>
         </p:spPr>
       </p:sp>
       <p:sp>
@@ -20380,21 +20535,16 @@
         </p:nvSpPr>
         <p:spPr>
           <a:xfrm>
-            <a:off x="640080" y="6419088"/>
-            <a:ext cx="10911535" cy="0"/>
-          </a:xfrm>
-          <a:prstGeom prst="line">
-            <a:avLst/>
-          </a:prstGeom>
-          <a:noFill/>
-          <a:ln w="9525">
-            <a:solidFill>
-              <a:srgbClr val="2A2C35"/>
-            </a:solidFill>
-            <a:prstDash val="solid"/>
-            <a:headEnd type="none"/>
-            <a:tailEnd type="none"/>
-          </a:ln>
+            <a:off x="640080" y="6413602"/>
+            <a:ext cx="10911535" cy="10973"/>
+          </a:xfrm>
+          <a:prstGeom prst="rect">
+            <a:avLst/>
+          </a:prstGeom>
+          <a:solidFill>
+            <a:srgbClr val="2A2C35"/>
+          </a:solidFill>
+          <a:ln/>
         </p:spPr>
       </p:sp>
       <p:sp>
@@ -20915,27 +21065,42 @@
           <p:nvPr/>
         </p:nvSpPr>
         <p:spPr>
-          <a:xfrm>
-            <a:off x="8503920" y="3154680"/>
-            <a:ext cx="0" cy="228600"/>
-          </a:xfrm>
-          <a:prstGeom prst="line">
-            <a:avLst/>
-          </a:prstGeom>
-          <a:noFill/>
-          <a:ln w="15875">
-            <a:solidFill>
-              <a:srgbClr val="3B3E4A"/>
-            </a:solidFill>
-            <a:prstDash val="solid"/>
-            <a:headEnd type="none"/>
-            <a:tailEnd type="triangle"/>
-          </a:ln>
+          <a:xfrm rot="5400000">
+            <a:off x="8430768" y="3219895"/>
+            <a:ext cx="146304" cy="15875"/>
+          </a:xfrm>
+          <a:prstGeom prst="rect">
+            <a:avLst/>
+          </a:prstGeom>
+          <a:solidFill>
+            <a:srgbClr val="3B3E4A"/>
+          </a:solidFill>
+          <a:ln/>
         </p:spPr>
       </p:sp>
       <p:sp>
         <p:nvSpPr>
           <p:cNvPr id="17" name="Shape 15"/>
+          <p:cNvSpPr/>
+          <p:nvPr/>
+        </p:nvSpPr>
+        <p:spPr>
+          <a:xfrm rot="10800000">
+            <a:off x="8445627" y="3246120"/>
+            <a:ext cx="116586" cy="137160"/>
+          </a:xfrm>
+          <a:prstGeom prst="triangle">
+            <a:avLst/>
+          </a:prstGeom>
+          <a:solidFill>
+            <a:srgbClr val="3B3E4A"/>
+          </a:solidFill>
+          <a:ln/>
+        </p:spPr>
+      </p:sp>
+      <p:sp>
+        <p:nvSpPr>
+          <p:cNvPr id="18" name="Shape 16"/>
           <p:cNvSpPr/>
           <p:nvPr/>
         </p:nvSpPr>
@@ -20962,7 +21127,7 @@
       </p:sp>
       <p:sp>
         <p:nvSpPr>
-          <p:cNvPr id="18" name="Text 16"/>
+          <p:cNvPr id="19" name="Text 17"/>
           <p:cNvSpPr/>
           <p:nvPr/>
         </p:nvSpPr>
@@ -21001,32 +21166,47 @@
       </p:sp>
       <p:sp>
         <p:nvSpPr>
-          <p:cNvPr id="19" name="Shape 17"/>
-          <p:cNvSpPr/>
-          <p:nvPr/>
-        </p:nvSpPr>
-        <p:spPr>
-          <a:xfrm>
-            <a:off x="8503920" y="3931920"/>
-            <a:ext cx="0" cy="228600"/>
-          </a:xfrm>
-          <a:prstGeom prst="line">
-            <a:avLst/>
-          </a:prstGeom>
-          <a:noFill/>
-          <a:ln w="15875">
-            <a:solidFill>
-              <a:srgbClr val="3B3E4A"/>
-            </a:solidFill>
-            <a:prstDash val="solid"/>
-            <a:headEnd type="none"/>
-            <a:tailEnd type="triangle"/>
-          </a:ln>
-        </p:spPr>
-      </p:sp>
-      <p:sp>
-        <p:nvSpPr>
           <p:cNvPr id="20" name="Shape 18"/>
+          <p:cNvSpPr/>
+          <p:nvPr/>
+        </p:nvSpPr>
+        <p:spPr>
+          <a:xfrm rot="5400000">
+            <a:off x="8430768" y="3997135"/>
+            <a:ext cx="146304" cy="15875"/>
+          </a:xfrm>
+          <a:prstGeom prst="rect">
+            <a:avLst/>
+          </a:prstGeom>
+          <a:solidFill>
+            <a:srgbClr val="3B3E4A"/>
+          </a:solidFill>
+          <a:ln/>
+        </p:spPr>
+      </p:sp>
+      <p:sp>
+        <p:nvSpPr>
+          <p:cNvPr id="21" name="Shape 19"/>
+          <p:cNvSpPr/>
+          <p:nvPr/>
+        </p:nvSpPr>
+        <p:spPr>
+          <a:xfrm rot="10800000">
+            <a:off x="8445627" y="4023360"/>
+            <a:ext cx="116586" cy="137160"/>
+          </a:xfrm>
+          <a:prstGeom prst="triangle">
+            <a:avLst/>
+          </a:prstGeom>
+          <a:solidFill>
+            <a:srgbClr val="3B3E4A"/>
+          </a:solidFill>
+          <a:ln/>
+        </p:spPr>
+      </p:sp>
+      <p:sp>
+        <p:nvSpPr>
+          <p:cNvPr id="22" name="Shape 20"/>
           <p:cNvSpPr/>
           <p:nvPr/>
         </p:nvSpPr>
@@ -21053,7 +21233,7 @@
       </p:sp>
       <p:sp>
         <p:nvSpPr>
-          <p:cNvPr id="21" name="Text 19"/>
+          <p:cNvPr id="23" name="Text 21"/>
           <p:cNvSpPr/>
           <p:nvPr/>
         </p:nvSpPr>
@@ -21092,32 +21272,47 @@
       </p:sp>
       <p:sp>
         <p:nvSpPr>
-          <p:cNvPr id="22" name="Shape 20"/>
-          <p:cNvSpPr/>
-          <p:nvPr/>
-        </p:nvSpPr>
-        <p:spPr>
-          <a:xfrm>
-            <a:off x="8503920" y="4709160"/>
-            <a:ext cx="0" cy="228600"/>
-          </a:xfrm>
-          <a:prstGeom prst="line">
-            <a:avLst/>
-          </a:prstGeom>
-          <a:noFill/>
-          <a:ln w="15875">
-            <a:solidFill>
-              <a:srgbClr val="3B3E4A"/>
-            </a:solidFill>
-            <a:prstDash val="solid"/>
-            <a:headEnd type="none"/>
-            <a:tailEnd type="triangle"/>
-          </a:ln>
-        </p:spPr>
-      </p:sp>
-      <p:sp>
-        <p:nvSpPr>
-          <p:cNvPr id="23" name="Shape 21"/>
+          <p:cNvPr id="24" name="Shape 22"/>
+          <p:cNvSpPr/>
+          <p:nvPr/>
+        </p:nvSpPr>
+        <p:spPr>
+          <a:xfrm rot="5400000">
+            <a:off x="8430768" y="4774375"/>
+            <a:ext cx="146304" cy="15875"/>
+          </a:xfrm>
+          <a:prstGeom prst="rect">
+            <a:avLst/>
+          </a:prstGeom>
+          <a:solidFill>
+            <a:srgbClr val="3B3E4A"/>
+          </a:solidFill>
+          <a:ln/>
+        </p:spPr>
+      </p:sp>
+      <p:sp>
+        <p:nvSpPr>
+          <p:cNvPr id="25" name="Shape 23"/>
+          <p:cNvSpPr/>
+          <p:nvPr/>
+        </p:nvSpPr>
+        <p:spPr>
+          <a:xfrm rot="10800000">
+            <a:off x="8445627" y="4800600"/>
+            <a:ext cx="116586" cy="137160"/>
+          </a:xfrm>
+          <a:prstGeom prst="triangle">
+            <a:avLst/>
+          </a:prstGeom>
+          <a:solidFill>
+            <a:srgbClr val="3B3E4A"/>
+          </a:solidFill>
+          <a:ln/>
+        </p:spPr>
+      </p:sp>
+      <p:sp>
+        <p:nvSpPr>
+          <p:cNvPr id="26" name="Shape 24"/>
           <p:cNvSpPr/>
           <p:nvPr/>
         </p:nvSpPr>
@@ -21144,7 +21339,7 @@
       </p:sp>
       <p:sp>
         <p:nvSpPr>
-          <p:cNvPr id="24" name="Text 22"/>
+          <p:cNvPr id="27" name="Text 25"/>
           <p:cNvSpPr/>
           <p:nvPr/>
         </p:nvSpPr>
@@ -21361,21 +21556,16 @@
         </p:nvSpPr>
         <p:spPr>
           <a:xfrm>
-            <a:off x="640080" y="6419088"/>
-            <a:ext cx="10911535" cy="0"/>
-          </a:xfrm>
-          <a:prstGeom prst="line">
-            <a:avLst/>
-          </a:prstGeom>
-          <a:noFill/>
-          <a:ln w="9525">
-            <a:solidFill>
-              <a:srgbClr val="2A2C35"/>
-            </a:solidFill>
-            <a:prstDash val="solid"/>
-            <a:headEnd type="none"/>
-            <a:tailEnd type="none"/>
-          </a:ln>
+            <a:off x="640080" y="6413602"/>
+            <a:ext cx="10911535" cy="10973"/>
+          </a:xfrm>
+          <a:prstGeom prst="rect">
+            <a:avLst/>
+          </a:prstGeom>
+          <a:solidFill>
+            <a:srgbClr val="2A2C35"/>
+          </a:solidFill>
+          <a:ln/>
         </p:spPr>
       </p:sp>
       <p:sp>
@@ -22062,21 +22252,16 @@
         </p:nvSpPr>
         <p:spPr>
           <a:xfrm>
-            <a:off x="640080" y="6419088"/>
-            <a:ext cx="10911535" cy="0"/>
-          </a:xfrm>
-          <a:prstGeom prst="line">
-            <a:avLst/>
-          </a:prstGeom>
-          <a:noFill/>
-          <a:ln w="9525">
-            <a:solidFill>
-              <a:srgbClr val="2A2C35"/>
-            </a:solidFill>
-            <a:prstDash val="solid"/>
-            <a:headEnd type="none"/>
-            <a:tailEnd type="none"/>
-          </a:ln>
+            <a:off x="640080" y="6413602"/>
+            <a:ext cx="10911535" cy="10973"/>
+          </a:xfrm>
+          <a:prstGeom prst="rect">
+            <a:avLst/>
+          </a:prstGeom>
+          <a:solidFill>
+            <a:srgbClr val="2A2C35"/>
+          </a:solidFill>
+          <a:ln/>
         </p:spPr>
       </p:sp>
       <p:sp>
@@ -22352,26 +22537,41 @@
         </p:nvSpPr>
         <p:spPr>
           <a:xfrm>
-            <a:off x="3154680" y="3154680"/>
-            <a:ext cx="365760" cy="0"/>
-          </a:xfrm>
-          <a:prstGeom prst="line">
-            <a:avLst/>
-          </a:prstGeom>
-          <a:noFill/>
-          <a:ln w="19050">
-            <a:solidFill>
-              <a:srgbClr val="9AA0AC"/>
-            </a:solidFill>
-            <a:prstDash val="solid"/>
-            <a:headEnd type="none"/>
-            <a:tailEnd type="triangle"/>
-          </a:ln>
+            <a:off x="3154680" y="3145155"/>
+            <a:ext cx="283464" cy="19050"/>
+          </a:xfrm>
+          <a:prstGeom prst="rect">
+            <a:avLst/>
+          </a:prstGeom>
+          <a:solidFill>
+            <a:srgbClr val="9AA0AC"/>
+          </a:solidFill>
+          <a:ln/>
         </p:spPr>
       </p:sp>
       <p:sp>
         <p:nvSpPr>
           <p:cNvPr id="15" name="Shape 13"/>
+          <p:cNvSpPr/>
+          <p:nvPr/>
+        </p:nvSpPr>
+        <p:spPr>
+          <a:xfrm rot="5400000">
+            <a:off x="3393567" y="3086100"/>
+            <a:ext cx="116586" cy="137160"/>
+          </a:xfrm>
+          <a:prstGeom prst="triangle">
+            <a:avLst/>
+          </a:prstGeom>
+          <a:solidFill>
+            <a:srgbClr val="9AA0AC"/>
+          </a:solidFill>
+          <a:ln/>
+        </p:spPr>
+      </p:sp>
+      <p:sp>
+        <p:nvSpPr>
+          <p:cNvPr id="16" name="Shape 14"/>
           <p:cNvSpPr/>
           <p:nvPr/>
         </p:nvSpPr>
@@ -22398,7 +22598,7 @@
       </p:sp>
       <p:sp>
         <p:nvSpPr>
-          <p:cNvPr id="16" name="Shape 14"/>
+          <p:cNvPr id="17" name="Shape 15"/>
           <p:cNvSpPr/>
           <p:nvPr/>
         </p:nvSpPr>
@@ -22418,7 +22618,7 @@
       </p:sp>
       <p:sp>
         <p:nvSpPr>
-          <p:cNvPr id="17" name="Text 15"/>
+          <p:cNvPr id="18" name="Text 16"/>
           <p:cNvSpPr/>
           <p:nvPr/>
         </p:nvSpPr>
@@ -22457,7 +22657,7 @@
       </p:sp>
       <p:sp>
         <p:nvSpPr>
-          <p:cNvPr id="18" name="Text 16"/>
+          <p:cNvPr id="19" name="Text 17"/>
           <p:cNvSpPr/>
           <p:nvPr/>
         </p:nvSpPr>
@@ -22519,32 +22719,47 @@
       </p:sp>
       <p:sp>
         <p:nvSpPr>
-          <p:cNvPr id="19" name="Shape 17"/>
-          <p:cNvSpPr/>
-          <p:nvPr/>
-        </p:nvSpPr>
-        <p:spPr>
-          <a:xfrm>
-            <a:off x="6035040" y="3154680"/>
-            <a:ext cx="365760" cy="0"/>
-          </a:xfrm>
-          <a:prstGeom prst="line">
-            <a:avLst/>
-          </a:prstGeom>
-          <a:noFill/>
-          <a:ln w="19050">
-            <a:solidFill>
-              <a:srgbClr val="9AA0AC"/>
-            </a:solidFill>
-            <a:prstDash val="solid"/>
-            <a:headEnd type="none"/>
-            <a:tailEnd type="triangle"/>
-          </a:ln>
-        </p:spPr>
-      </p:sp>
-      <p:sp>
-        <p:nvSpPr>
           <p:cNvPr id="20" name="Shape 18"/>
+          <p:cNvSpPr/>
+          <p:nvPr/>
+        </p:nvSpPr>
+        <p:spPr>
+          <a:xfrm>
+            <a:off x="6035040" y="3145155"/>
+            <a:ext cx="283464" cy="19050"/>
+          </a:xfrm>
+          <a:prstGeom prst="rect">
+            <a:avLst/>
+          </a:prstGeom>
+          <a:solidFill>
+            <a:srgbClr val="9AA0AC"/>
+          </a:solidFill>
+          <a:ln/>
+        </p:spPr>
+      </p:sp>
+      <p:sp>
+        <p:nvSpPr>
+          <p:cNvPr id="21" name="Shape 19"/>
+          <p:cNvSpPr/>
+          <p:nvPr/>
+        </p:nvSpPr>
+        <p:spPr>
+          <a:xfrm rot="5400000">
+            <a:off x="6273927" y="3086100"/>
+            <a:ext cx="116586" cy="137160"/>
+          </a:xfrm>
+          <a:prstGeom prst="triangle">
+            <a:avLst/>
+          </a:prstGeom>
+          <a:solidFill>
+            <a:srgbClr val="9AA0AC"/>
+          </a:solidFill>
+          <a:ln/>
+        </p:spPr>
+      </p:sp>
+      <p:sp>
+        <p:nvSpPr>
+          <p:cNvPr id="22" name="Shape 20"/>
           <p:cNvSpPr/>
           <p:nvPr/>
         </p:nvSpPr>
@@ -22571,7 +22786,7 @@
       </p:sp>
       <p:sp>
         <p:nvSpPr>
-          <p:cNvPr id="21" name="Shape 19"/>
+          <p:cNvPr id="23" name="Shape 21"/>
           <p:cNvSpPr/>
           <p:nvPr/>
         </p:nvSpPr>
@@ -22591,7 +22806,7 @@
       </p:sp>
       <p:sp>
         <p:nvSpPr>
-          <p:cNvPr id="22" name="Text 20"/>
+          <p:cNvPr id="24" name="Text 22"/>
           <p:cNvSpPr/>
           <p:nvPr/>
         </p:nvSpPr>
@@ -22630,7 +22845,7 @@
       </p:sp>
       <p:sp>
         <p:nvSpPr>
-          <p:cNvPr id="23" name="Text 21"/>
+          <p:cNvPr id="25" name="Text 23"/>
           <p:cNvSpPr/>
           <p:nvPr/>
         </p:nvSpPr>
@@ -22692,32 +22907,47 @@
       </p:sp>
       <p:sp>
         <p:nvSpPr>
-          <p:cNvPr id="24" name="Shape 22"/>
-          <p:cNvSpPr/>
-          <p:nvPr/>
-        </p:nvSpPr>
-        <p:spPr>
-          <a:xfrm>
-            <a:off x="8915400" y="3154680"/>
-            <a:ext cx="365760" cy="0"/>
-          </a:xfrm>
-          <a:prstGeom prst="line">
-            <a:avLst/>
-          </a:prstGeom>
-          <a:noFill/>
-          <a:ln w="19050">
-            <a:solidFill>
-              <a:srgbClr val="9AA0AC"/>
-            </a:solidFill>
-            <a:prstDash val="solid"/>
-            <a:headEnd type="none"/>
-            <a:tailEnd type="triangle"/>
-          </a:ln>
-        </p:spPr>
-      </p:sp>
-      <p:sp>
-        <p:nvSpPr>
-          <p:cNvPr id="25" name="Shape 23"/>
+          <p:cNvPr id="26" name="Shape 24"/>
+          <p:cNvSpPr/>
+          <p:nvPr/>
+        </p:nvSpPr>
+        <p:spPr>
+          <a:xfrm>
+            <a:off x="8915400" y="3145155"/>
+            <a:ext cx="283464" cy="19050"/>
+          </a:xfrm>
+          <a:prstGeom prst="rect">
+            <a:avLst/>
+          </a:prstGeom>
+          <a:solidFill>
+            <a:srgbClr val="9AA0AC"/>
+          </a:solidFill>
+          <a:ln/>
+        </p:spPr>
+      </p:sp>
+      <p:sp>
+        <p:nvSpPr>
+          <p:cNvPr id="27" name="Shape 25"/>
+          <p:cNvSpPr/>
+          <p:nvPr/>
+        </p:nvSpPr>
+        <p:spPr>
+          <a:xfrm rot="5400000">
+            <a:off x="9154287" y="3086100"/>
+            <a:ext cx="116586" cy="137160"/>
+          </a:xfrm>
+          <a:prstGeom prst="triangle">
+            <a:avLst/>
+          </a:prstGeom>
+          <a:solidFill>
+            <a:srgbClr val="9AA0AC"/>
+          </a:solidFill>
+          <a:ln/>
+        </p:spPr>
+      </p:sp>
+      <p:sp>
+        <p:nvSpPr>
+          <p:cNvPr id="28" name="Shape 26"/>
           <p:cNvSpPr/>
           <p:nvPr/>
         </p:nvSpPr>
@@ -22744,7 +22974,7 @@
       </p:sp>
       <p:sp>
         <p:nvSpPr>
-          <p:cNvPr id="26" name="Shape 24"/>
+          <p:cNvPr id="29" name="Shape 27"/>
           <p:cNvSpPr/>
           <p:nvPr/>
         </p:nvSpPr>
@@ -22764,7 +22994,7 @@
       </p:sp>
       <p:sp>
         <p:nvSpPr>
-          <p:cNvPr id="27" name="Text 25"/>
+          <p:cNvPr id="30" name="Text 28"/>
           <p:cNvSpPr/>
           <p:nvPr/>
         </p:nvSpPr>
@@ -22803,7 +23033,7 @@
       </p:sp>
       <p:sp>
         <p:nvSpPr>
-          <p:cNvPr id="28" name="Text 26"/>
+          <p:cNvPr id="31" name="Text 29"/>
           <p:cNvSpPr/>
           <p:nvPr/>
         </p:nvSpPr>
@@ -22865,7 +23095,7 @@
       </p:sp>
       <p:sp>
         <p:nvSpPr>
-          <p:cNvPr id="29" name="Shape 27"/>
+          <p:cNvPr id="32" name="Shape 30"/>
           <p:cNvSpPr/>
           <p:nvPr/>
         </p:nvSpPr>
@@ -22892,7 +23122,7 @@
       </p:sp>
       <p:sp>
         <p:nvSpPr>
-          <p:cNvPr id="30" name="Shape 28"/>
+          <p:cNvPr id="33" name="Shape 31"/>
           <p:cNvSpPr/>
           <p:nvPr/>
         </p:nvSpPr>
@@ -22912,7 +23142,7 @@
       </p:sp>
       <p:sp>
         <p:nvSpPr>
-          <p:cNvPr id="31" name="Text 29"/>
+          <p:cNvPr id="34" name="Text 32"/>
           <p:cNvSpPr/>
           <p:nvPr/>
         </p:nvSpPr>
@@ -22951,7 +23181,7 @@
       </p:sp>
       <p:sp>
         <p:nvSpPr>
-          <p:cNvPr id="32" name="Text 30"/>
+          <p:cNvPr id="35" name="Text 33"/>
           <p:cNvSpPr/>
           <p:nvPr/>
         </p:nvSpPr>
@@ -22990,32 +23220,47 @@
       </p:sp>
       <p:sp>
         <p:nvSpPr>
-          <p:cNvPr id="33" name="Shape 31"/>
-          <p:cNvSpPr/>
-          <p:nvPr/>
-        </p:nvSpPr>
-        <p:spPr>
-          <a:xfrm>
-            <a:off x="3840480" y="5193792"/>
-            <a:ext cx="640080" cy="0"/>
-          </a:xfrm>
-          <a:prstGeom prst="line">
-            <a:avLst/>
-          </a:prstGeom>
-          <a:noFill/>
-          <a:ln w="19050">
-            <a:solidFill>
-              <a:srgbClr val="5B8CFF"/>
-            </a:solidFill>
-            <a:prstDash val="solid"/>
-            <a:headEnd type="none"/>
-            <a:tailEnd type="triangle"/>
-          </a:ln>
-        </p:spPr>
-      </p:sp>
-      <p:sp>
-        <p:nvSpPr>
-          <p:cNvPr id="34" name="Text 32"/>
+          <p:cNvPr id="36" name="Shape 34"/>
+          <p:cNvSpPr/>
+          <p:nvPr/>
+        </p:nvSpPr>
+        <p:spPr>
+          <a:xfrm>
+            <a:off x="3840480" y="5184267"/>
+            <a:ext cx="557784" cy="19050"/>
+          </a:xfrm>
+          <a:prstGeom prst="rect">
+            <a:avLst/>
+          </a:prstGeom>
+          <a:solidFill>
+            <a:srgbClr val="5B8CFF"/>
+          </a:solidFill>
+          <a:ln/>
+        </p:spPr>
+      </p:sp>
+      <p:sp>
+        <p:nvSpPr>
+          <p:cNvPr id="37" name="Shape 35"/>
+          <p:cNvSpPr/>
+          <p:nvPr/>
+        </p:nvSpPr>
+        <p:spPr>
+          <a:xfrm rot="5400000">
+            <a:off x="4353687" y="5125212"/>
+            <a:ext cx="116586" cy="137160"/>
+          </a:xfrm>
+          <a:prstGeom prst="triangle">
+            <a:avLst/>
+          </a:prstGeom>
+          <a:solidFill>
+            <a:srgbClr val="5B8CFF"/>
+          </a:solidFill>
+          <a:ln/>
+        </p:spPr>
+      </p:sp>
+      <p:sp>
+        <p:nvSpPr>
+          <p:cNvPr id="38" name="Text 36"/>
           <p:cNvSpPr/>
           <p:nvPr/>
         </p:nvSpPr>
@@ -23232,21 +23477,16 @@
         </p:nvSpPr>
         <p:spPr>
           <a:xfrm>
-            <a:off x="640080" y="6419088"/>
-            <a:ext cx="10911535" cy="0"/>
-          </a:xfrm>
-          <a:prstGeom prst="line">
-            <a:avLst/>
-          </a:prstGeom>
-          <a:noFill/>
-          <a:ln w="9525">
-            <a:solidFill>
-              <a:srgbClr val="2A2C35"/>
-            </a:solidFill>
-            <a:prstDash val="solid"/>
-            <a:headEnd type="none"/>
-            <a:tailEnd type="none"/>
-          </a:ln>
+            <a:off x="640080" y="6413602"/>
+            <a:ext cx="10911535" cy="10973"/>
+          </a:xfrm>
+          <a:prstGeom prst="rect">
+            <a:avLst/>
+          </a:prstGeom>
+          <a:solidFill>
+            <a:srgbClr val="2A2C35"/>
+          </a:solidFill>
+          <a:ln/>
         </p:spPr>
       </p:sp>
       <p:sp>
@@ -24470,21 +24710,16 @@
         </p:nvSpPr>
         <p:spPr>
           <a:xfrm>
-            <a:off x="640080" y="6419088"/>
-            <a:ext cx="10911535" cy="0"/>
-          </a:xfrm>
-          <a:prstGeom prst="line">
-            <a:avLst/>
-          </a:prstGeom>
-          <a:noFill/>
-          <a:ln w="9525">
-            <a:solidFill>
-              <a:srgbClr val="2A2C35"/>
-            </a:solidFill>
-            <a:prstDash val="solid"/>
-            <a:headEnd type="none"/>
-            <a:tailEnd type="none"/>
-          </a:ln>
+            <a:off x="640080" y="6413602"/>
+            <a:ext cx="10911535" cy="10973"/>
+          </a:xfrm>
+          <a:prstGeom prst="rect">
+            <a:avLst/>
+          </a:prstGeom>
+          <a:solidFill>
+            <a:srgbClr val="2A2C35"/>
+          </a:solidFill>
+          <a:ln/>
         </p:spPr>
       </p:sp>
       <p:sp>
@@ -24745,21 +24980,16 @@
         </p:nvSpPr>
         <p:spPr>
           <a:xfrm>
-            <a:off x="640080" y="6419088"/>
-            <a:ext cx="10911535" cy="0"/>
-          </a:xfrm>
-          <a:prstGeom prst="line">
-            <a:avLst/>
-          </a:prstGeom>
-          <a:noFill/>
-          <a:ln w="9525">
-            <a:solidFill>
-              <a:srgbClr val="2A2C35"/>
-            </a:solidFill>
-            <a:prstDash val="solid"/>
-            <a:headEnd type="none"/>
-            <a:tailEnd type="none"/>
-          </a:ln>
+            <a:off x="640080" y="6413602"/>
+            <a:ext cx="10911535" cy="10973"/>
+          </a:xfrm>
+          <a:prstGeom prst="rect">
+            <a:avLst/>
+          </a:prstGeom>
+          <a:solidFill>
+            <a:srgbClr val="2A2C35"/>
+          </a:solidFill>
+          <a:ln/>
         </p:spPr>
       </p:sp>
       <p:sp>
@@ -25485,21 +25715,16 @@
         </p:nvSpPr>
         <p:spPr>
           <a:xfrm>
-            <a:off x="640080" y="6419088"/>
-            <a:ext cx="10911535" cy="0"/>
-          </a:xfrm>
-          <a:prstGeom prst="line">
-            <a:avLst/>
-          </a:prstGeom>
-          <a:noFill/>
-          <a:ln w="9525">
-            <a:solidFill>
-              <a:srgbClr val="2A2C35"/>
-            </a:solidFill>
-            <a:prstDash val="solid"/>
-            <a:headEnd type="none"/>
-            <a:tailEnd type="none"/>
-          </a:ln>
+            <a:off x="640080" y="6413602"/>
+            <a:ext cx="10911535" cy="10973"/>
+          </a:xfrm>
+          <a:prstGeom prst="rect">
+            <a:avLst/>
+          </a:prstGeom>
+          <a:solidFill>
+            <a:srgbClr val="2A2C35"/>
+          </a:solidFill>
+          <a:ln/>
         </p:spPr>
       </p:sp>
       <p:sp>
@@ -26424,21 +26649,16 @@
         </p:nvSpPr>
         <p:spPr>
           <a:xfrm>
-            <a:off x="640080" y="6419088"/>
-            <a:ext cx="10911535" cy="0"/>
-          </a:xfrm>
-          <a:prstGeom prst="line">
-            <a:avLst/>
-          </a:prstGeom>
-          <a:noFill/>
-          <a:ln w="9525">
-            <a:solidFill>
-              <a:srgbClr val="2A2C35"/>
-            </a:solidFill>
-            <a:prstDash val="solid"/>
-            <a:headEnd type="none"/>
-            <a:tailEnd type="none"/>
-          </a:ln>
+            <a:off x="640080" y="6413602"/>
+            <a:ext cx="10911535" cy="10973"/>
+          </a:xfrm>
+          <a:prstGeom prst="rect">
+            <a:avLst/>
+          </a:prstGeom>
+          <a:solidFill>
+            <a:srgbClr val="2A2C35"/>
+          </a:solidFill>
+          <a:ln/>
         </p:spPr>
       </p:sp>
       <p:sp>
@@ -26652,21 +26872,16 @@
         </p:nvSpPr>
         <p:spPr>
           <a:xfrm>
-            <a:off x="4617720" y="2487168"/>
-            <a:ext cx="2971800" cy="0"/>
-          </a:xfrm>
-          <a:prstGeom prst="line">
-            <a:avLst/>
-          </a:prstGeom>
-          <a:noFill/>
-          <a:ln w="12700">
-            <a:solidFill>
-              <a:srgbClr val="2DD4A7"/>
-            </a:solidFill>
-            <a:prstDash val="solid"/>
-            <a:headEnd type="none"/>
-            <a:tailEnd type="none"/>
-          </a:ln>
+            <a:off x="4617720" y="2480818"/>
+            <a:ext cx="2971800" cy="12700"/>
+          </a:xfrm>
+          <a:prstGeom prst="rect">
+            <a:avLst/>
+          </a:prstGeom>
+          <a:solidFill>
+            <a:srgbClr val="2DD4A7"/>
+          </a:solidFill>
+          <a:ln/>
         </p:spPr>
       </p:sp>
       <p:sp>
@@ -26759,21 +26974,16 @@
         </p:nvSpPr>
         <p:spPr>
           <a:xfrm>
-            <a:off x="4617720" y="3204972"/>
-            <a:ext cx="2971800" cy="0"/>
-          </a:xfrm>
-          <a:prstGeom prst="line">
-            <a:avLst/>
-          </a:prstGeom>
-          <a:noFill/>
-          <a:ln w="12700">
-            <a:solidFill>
-              <a:srgbClr val="2DD4A7"/>
-            </a:solidFill>
-            <a:prstDash val="solid"/>
-            <a:headEnd type="none"/>
-            <a:tailEnd type="none"/>
-          </a:ln>
+            <a:off x="4617720" y="3198622"/>
+            <a:ext cx="2971800" cy="12700"/>
+          </a:xfrm>
+          <a:prstGeom prst="rect">
+            <a:avLst/>
+          </a:prstGeom>
+          <a:solidFill>
+            <a:srgbClr val="2DD4A7"/>
+          </a:solidFill>
+          <a:ln/>
         </p:spPr>
       </p:sp>
       <p:sp>
@@ -26991,21 +27201,16 @@
         </p:nvSpPr>
         <p:spPr>
           <a:xfrm>
-            <a:off x="640080" y="4956048"/>
-            <a:ext cx="2743200" cy="0"/>
-          </a:xfrm>
-          <a:prstGeom prst="line">
-            <a:avLst/>
-          </a:prstGeom>
-          <a:noFill/>
-          <a:ln w="12700">
-            <a:solidFill>
-              <a:srgbClr val="A78BFA"/>
-            </a:solidFill>
-            <a:prstDash val="solid"/>
-            <a:headEnd type="none"/>
-            <a:tailEnd type="none"/>
-          </a:ln>
+            <a:off x="640080" y="4949698"/>
+            <a:ext cx="2743200" cy="12700"/>
+          </a:xfrm>
+          <a:prstGeom prst="rect">
+            <a:avLst/>
+          </a:prstGeom>
+          <a:solidFill>
+            <a:srgbClr val="A78BFA"/>
+          </a:solidFill>
+          <a:ln/>
         </p:spPr>
       </p:sp>
       <p:sp>
@@ -27183,21 +27388,16 @@
         </p:nvSpPr>
         <p:spPr>
           <a:xfrm>
-            <a:off x="8549640" y="4956048"/>
-            <a:ext cx="2743200" cy="0"/>
-          </a:xfrm>
-          <a:prstGeom prst="line">
-            <a:avLst/>
-          </a:prstGeom>
-          <a:noFill/>
-          <a:ln w="12700">
-            <a:solidFill>
-              <a:srgbClr val="A78BFA"/>
-            </a:solidFill>
-            <a:prstDash val="solid"/>
-            <a:headEnd type="none"/>
-            <a:tailEnd type="none"/>
-          </a:ln>
+            <a:off x="8549640" y="4949698"/>
+            <a:ext cx="2743200" cy="12700"/>
+          </a:xfrm>
+          <a:prstGeom prst="rect">
+            <a:avLst/>
+          </a:prstGeom>
+          <a:solidFill>
+            <a:srgbClr val="A78BFA"/>
+          </a:solidFill>
+          <a:ln/>
         </p:spPr>
       </p:sp>
       <p:sp>
@@ -27593,22 +27793,17 @@
           <p:nvPr/>
         </p:nvSpPr>
         <p:spPr>
-          <a:xfrm>
-            <a:off x="5120640" y="4572000"/>
-            <a:ext cx="-2926080" cy="-1783080"/>
-          </a:xfrm>
-          <a:prstGeom prst="line">
-            <a:avLst/>
-          </a:prstGeom>
-          <a:noFill/>
-          <a:ln w="15875">
-            <a:solidFill>
-              <a:srgbClr val="2DD4A7"/>
-            </a:solidFill>
-            <a:prstDash val="solid"/>
-            <a:headEnd type="none"/>
-            <a:tailEnd type="triangle"/>
-          </a:ln>
+          <a:xfrm rot="-8918575">
+            <a:off x="2020606" y="3693935"/>
+            <a:ext cx="3344265" cy="15875"/>
+          </a:xfrm>
+          <a:prstGeom prst="rect">
+            <a:avLst/>
+          </a:prstGeom>
+          <a:solidFill>
+            <a:srgbClr val="2DD4A7"/>
+          </a:solidFill>
+          <a:ln/>
         </p:spPr>
       </p:sp>
       <p:sp>
@@ -27618,22 +27813,17 @@
           <p:nvPr/>
         </p:nvSpPr>
         <p:spPr>
-          <a:xfrm>
-            <a:off x="7040880" y="4572000"/>
-            <a:ext cx="2468880" cy="-1783080"/>
-          </a:xfrm>
-          <a:prstGeom prst="line">
-            <a:avLst/>
-          </a:prstGeom>
-          <a:noFill/>
-          <a:ln w="15875">
-            <a:solidFill>
-              <a:srgbClr val="2DD4A7"/>
-            </a:solidFill>
-            <a:prstDash val="solid"/>
-            <a:headEnd type="none"/>
-            <a:tailEnd type="triangle"/>
-          </a:ln>
+          <a:xfrm rot="-3518575">
+            <a:off x="2194830" y="2756027"/>
+            <a:ext cx="116586" cy="137160"/>
+          </a:xfrm>
+          <a:prstGeom prst="triangle">
+            <a:avLst/>
+          </a:prstGeom>
+          <a:solidFill>
+            <a:srgbClr val="2DD4A7"/>
+          </a:solidFill>
+          <a:ln/>
         </p:spPr>
       </p:sp>
       <p:sp>
@@ -27643,22 +27833,17 @@
           <p:nvPr/>
         </p:nvSpPr>
         <p:spPr>
-          <a:xfrm>
-            <a:off x="1554480" y="5806440"/>
-            <a:ext cx="0" cy="-411480"/>
-          </a:xfrm>
-          <a:prstGeom prst="line">
-            <a:avLst/>
-          </a:prstGeom>
-          <a:noFill/>
-          <a:ln w="15875">
-            <a:solidFill>
-              <a:srgbClr val="A78BFA"/>
-            </a:solidFill>
-            <a:prstDash val="solid"/>
-            <a:headEnd type="none"/>
-            <a:tailEnd type="triangle"/>
-          </a:ln>
+          <a:xfrm rot="-2150259">
+            <a:off x="6760387" y="3696614"/>
+            <a:ext cx="2963150" cy="15875"/>
+          </a:xfrm>
+          <a:prstGeom prst="rect">
+            <a:avLst/>
+          </a:prstGeom>
+          <a:solidFill>
+            <a:srgbClr val="2DD4A7"/>
+          </a:solidFill>
+          <a:ln/>
         </p:spPr>
       </p:sp>
       <p:sp>
@@ -27668,22 +27853,17 @@
           <p:nvPr/>
         </p:nvSpPr>
         <p:spPr>
-          <a:xfrm>
-            <a:off x="4114800" y="5806440"/>
-            <a:ext cx="-2011680" cy="-411480"/>
-          </a:xfrm>
-          <a:prstGeom prst="line">
-            <a:avLst/>
-          </a:prstGeom>
-          <a:noFill/>
-          <a:ln w="12700">
-            <a:solidFill>
-              <a:srgbClr val="9AA0AC"/>
-            </a:solidFill>
-            <a:prstDash val="solid"/>
-            <a:headEnd type="none"/>
-            <a:tailEnd type="triangle"/>
-          </a:ln>
+          <a:xfrm rot="3249741">
+            <a:off x="9395871" y="2760493"/>
+            <a:ext cx="116586" cy="137160"/>
+          </a:xfrm>
+          <a:prstGeom prst="triangle">
+            <a:avLst/>
+          </a:prstGeom>
+          <a:solidFill>
+            <a:srgbClr val="2DD4A7"/>
+          </a:solidFill>
+          <a:ln/>
         </p:spPr>
       </p:sp>
       <p:sp>
@@ -27693,22 +27873,17 @@
           <p:nvPr/>
         </p:nvSpPr>
         <p:spPr>
-          <a:xfrm>
-            <a:off x="9326880" y="5806440"/>
-            <a:ext cx="365760" cy="-411480"/>
-          </a:xfrm>
-          <a:prstGeom prst="line">
-            <a:avLst/>
-          </a:prstGeom>
-          <a:noFill/>
-          <a:ln w="15875">
-            <a:solidFill>
-              <a:srgbClr val="A78BFA"/>
-            </a:solidFill>
-            <a:prstDash val="solid"/>
-            <a:headEnd type="none"/>
-            <a:tailEnd type="triangle"/>
-          </a:ln>
+          <a:xfrm rot="-5400000">
+            <a:off x="1389888" y="5633911"/>
+            <a:ext cx="329184" cy="15875"/>
+          </a:xfrm>
+          <a:prstGeom prst="rect">
+            <a:avLst/>
+          </a:prstGeom>
+          <a:solidFill>
+            <a:srgbClr val="A78BFA"/>
+          </a:solidFill>
+          <a:ln/>
         </p:spPr>
       </p:sp>
       <p:sp>
@@ -27719,26 +27894,141 @@
         </p:nvSpPr>
         <p:spPr>
           <a:xfrm>
-            <a:off x="11155680" y="5806440"/>
-            <a:ext cx="-914400" cy="-411480"/>
-          </a:xfrm>
-          <a:prstGeom prst="line">
-            <a:avLst/>
-          </a:prstGeom>
-          <a:noFill/>
-          <a:ln w="12700">
-            <a:solidFill>
-              <a:srgbClr val="9AA0AC"/>
-            </a:solidFill>
-            <a:prstDash val="solid"/>
-            <a:headEnd type="none"/>
-            <a:tailEnd type="triangle"/>
-          </a:ln>
-        </p:spPr>
-      </p:sp>
-      <p:sp>
-        <p:nvSpPr>
-          <p:cNvPr id="47" name="Text 45"/>
+            <a:off x="1496187" y="5394960"/>
+            <a:ext cx="116586" cy="137160"/>
+          </a:xfrm>
+          <a:prstGeom prst="triangle">
+            <a:avLst/>
+          </a:prstGeom>
+          <a:solidFill>
+            <a:srgbClr val="A78BFA"/>
+          </a:solidFill>
+          <a:ln/>
+        </p:spPr>
+      </p:sp>
+      <p:sp>
+        <p:nvSpPr>
+          <p:cNvPr id="47" name="Shape 45"/>
+          <p:cNvSpPr/>
+          <p:nvPr/>
+        </p:nvSpPr>
+        <p:spPr>
+          <a:xfrm rot="-10106392">
+            <a:off x="2163755" y="5602596"/>
+            <a:ext cx="1971036" cy="12700"/>
+          </a:xfrm>
+          <a:prstGeom prst="rect">
+            <a:avLst/>
+          </a:prstGeom>
+          <a:solidFill>
+            <a:srgbClr val="9AA0AC"/>
+          </a:solidFill>
+          <a:ln/>
+        </p:spPr>
+      </p:sp>
+      <p:sp>
+        <p:nvSpPr>
+          <p:cNvPr id="48" name="Shape 46"/>
+          <p:cNvSpPr/>
+          <p:nvPr/>
+        </p:nvSpPr>
+        <p:spPr>
+          <a:xfrm rot="-4706392">
+            <a:off x="2112016" y="5340123"/>
+            <a:ext cx="116586" cy="137160"/>
+          </a:xfrm>
+          <a:prstGeom prst="triangle">
+            <a:avLst/>
+          </a:prstGeom>
+          <a:solidFill>
+            <a:srgbClr val="9AA0AC"/>
+          </a:solidFill>
+          <a:ln/>
+        </p:spPr>
+      </p:sp>
+      <p:sp>
+        <p:nvSpPr>
+          <p:cNvPr id="49" name="Shape 47"/>
+          <p:cNvSpPr/>
+          <p:nvPr/>
+        </p:nvSpPr>
+        <p:spPr>
+          <a:xfrm rot="-2901988">
+            <a:off x="9248300" y="5623517"/>
+            <a:ext cx="468246" cy="15875"/>
+          </a:xfrm>
+          <a:prstGeom prst="rect">
+            <a:avLst/>
+          </a:prstGeom>
+          <a:solidFill>
+            <a:srgbClr val="A78BFA"/>
+          </a:solidFill>
+          <a:ln/>
+        </p:spPr>
+      </p:sp>
+      <p:sp>
+        <p:nvSpPr>
+          <p:cNvPr id="50" name="Shape 48"/>
+          <p:cNvSpPr/>
+          <p:nvPr/>
+        </p:nvSpPr>
+        <p:spPr>
+          <a:xfrm rot="2498012">
+            <a:off x="9588785" y="5377637"/>
+            <a:ext cx="116586" cy="137160"/>
+          </a:xfrm>
+          <a:prstGeom prst="triangle">
+            <a:avLst/>
+          </a:prstGeom>
+          <a:solidFill>
+            <a:srgbClr val="A78BFA"/>
+          </a:solidFill>
+          <a:ln/>
+        </p:spPr>
+      </p:sp>
+      <p:sp>
+        <p:nvSpPr>
+          <p:cNvPr id="51" name="Shape 49"/>
+          <p:cNvSpPr/>
+          <p:nvPr/>
+        </p:nvSpPr>
+        <p:spPr>
+          <a:xfrm rot="-9346335">
+            <a:off x="10275793" y="5611236"/>
+            <a:ext cx="920422" cy="12700"/>
+          </a:xfrm>
+          <a:prstGeom prst="rect">
+            <a:avLst/>
+          </a:prstGeom>
+          <a:solidFill>
+            <a:srgbClr val="9AA0AC"/>
+          </a:solidFill>
+          <a:ln/>
+        </p:spPr>
+      </p:sp>
+      <p:sp>
+        <p:nvSpPr>
+          <p:cNvPr id="52" name="Shape 50"/>
+          <p:cNvSpPr/>
+          <p:nvPr/>
+        </p:nvSpPr>
+        <p:spPr>
+          <a:xfrm rot="-3946335">
+            <a:off x="10245527" y="5354523"/>
+            <a:ext cx="116586" cy="137160"/>
+          </a:xfrm>
+          <a:prstGeom prst="triangle">
+            <a:avLst/>
+          </a:prstGeom>
+          <a:solidFill>
+            <a:srgbClr val="9AA0AC"/>
+          </a:solidFill>
+          <a:ln/>
+        </p:spPr>
+      </p:sp>
+      <p:sp>
+        <p:nvSpPr>
+          <p:cNvPr id="53" name="Text 51"/>
           <p:cNvSpPr/>
           <p:nvPr/>
         </p:nvSpPr>
@@ -27777,7 +28067,7 @@
       </p:sp>
       <p:sp>
         <p:nvSpPr>
-          <p:cNvPr id="48" name="Text 46"/>
+          <p:cNvPr id="54" name="Text 52"/>
           <p:cNvSpPr/>
           <p:nvPr/>
         </p:nvSpPr>
@@ -27952,21 +28242,16 @@
         </p:nvSpPr>
         <p:spPr>
           <a:xfrm>
-            <a:off x="640080" y="6419088"/>
-            <a:ext cx="10911535" cy="0"/>
-          </a:xfrm>
-          <a:prstGeom prst="line">
-            <a:avLst/>
-          </a:prstGeom>
-          <a:noFill/>
-          <a:ln w="9525">
-            <a:solidFill>
-              <a:srgbClr val="2A2C35"/>
-            </a:solidFill>
-            <a:prstDash val="solid"/>
-            <a:headEnd type="none"/>
-            <a:tailEnd type="none"/>
-          </a:ln>
+            <a:off x="640080" y="6413602"/>
+            <a:ext cx="10911535" cy="10973"/>
+          </a:xfrm>
+          <a:prstGeom prst="rect">
+            <a:avLst/>
+          </a:prstGeom>
+          <a:solidFill>
+            <a:srgbClr val="2A2C35"/>
+          </a:solidFill>
+          <a:ln/>
         </p:spPr>
       </p:sp>
       <p:sp>
@@ -29250,21 +29535,16 @@
         </p:nvSpPr>
         <p:spPr>
           <a:xfrm>
-            <a:off x="640080" y="6419088"/>
-            <a:ext cx="10911535" cy="0"/>
-          </a:xfrm>
-          <a:prstGeom prst="line">
-            <a:avLst/>
-          </a:prstGeom>
-          <a:noFill/>
-          <a:ln w="9525">
-            <a:solidFill>
-              <a:srgbClr val="2A2C35"/>
-            </a:solidFill>
-            <a:prstDash val="solid"/>
-            <a:headEnd type="none"/>
-            <a:tailEnd type="none"/>
-          </a:ln>
+            <a:off x="640080" y="6413602"/>
+            <a:ext cx="10911535" cy="10973"/>
+          </a:xfrm>
+          <a:prstGeom prst="rect">
+            <a:avLst/>
+          </a:prstGeom>
+          <a:solidFill>
+            <a:srgbClr val="2A2C35"/>
+          </a:solidFill>
+          <a:ln/>
         </p:spPr>
       </p:sp>
       <p:sp>
@@ -29536,26 +29816,41 @@
         </p:nvSpPr>
         <p:spPr>
           <a:xfrm>
-            <a:off x="2606040" y="3383280"/>
-            <a:ext cx="270434" cy="0"/>
-          </a:xfrm>
-          <a:prstGeom prst="line">
-            <a:avLst/>
-          </a:prstGeom>
-          <a:noFill/>
-          <a:ln w="19050">
-            <a:solidFill>
-              <a:srgbClr val="3B3E4A"/>
-            </a:solidFill>
-            <a:prstDash val="solid"/>
-            <a:headEnd type="none"/>
-            <a:tailEnd type="triangle"/>
-          </a:ln>
+            <a:off x="2606040" y="3373755"/>
+            <a:ext cx="188138" cy="19050"/>
+          </a:xfrm>
+          <a:prstGeom prst="rect">
+            <a:avLst/>
+          </a:prstGeom>
+          <a:solidFill>
+            <a:srgbClr val="3B3E4A"/>
+          </a:solidFill>
+          <a:ln/>
         </p:spPr>
       </p:sp>
       <p:sp>
         <p:nvSpPr>
           <p:cNvPr id="15" name="Shape 13"/>
+          <p:cNvSpPr/>
+          <p:nvPr/>
+        </p:nvSpPr>
+        <p:spPr>
+          <a:xfrm rot="5400000">
+            <a:off x="2749601" y="3314700"/>
+            <a:ext cx="116586" cy="137160"/>
+          </a:xfrm>
+          <a:prstGeom prst="triangle">
+            <a:avLst/>
+          </a:prstGeom>
+          <a:solidFill>
+            <a:srgbClr val="3B3E4A"/>
+          </a:solidFill>
+          <a:ln/>
+        </p:spPr>
+      </p:sp>
+      <p:sp>
+        <p:nvSpPr>
+          <p:cNvPr id="16" name="Shape 14"/>
           <p:cNvSpPr/>
           <p:nvPr/>
         </p:nvSpPr>
@@ -29582,7 +29877,7 @@
       </p:sp>
       <p:sp>
         <p:nvSpPr>
-          <p:cNvPr id="16" name="Text 14"/>
+          <p:cNvPr id="17" name="Text 15"/>
           <p:cNvSpPr/>
           <p:nvPr/>
         </p:nvSpPr>
@@ -29621,7 +29916,7 @@
       </p:sp>
       <p:sp>
         <p:nvSpPr>
-          <p:cNvPr id="17" name="Text 15"/>
+          <p:cNvPr id="18" name="Text 16"/>
           <p:cNvSpPr/>
           <p:nvPr/>
         </p:nvSpPr>
@@ -29660,7 +29955,7 @@
       </p:sp>
       <p:sp>
         <p:nvSpPr>
-          <p:cNvPr id="18" name="Text 16"/>
+          <p:cNvPr id="19" name="Text 17"/>
           <p:cNvSpPr/>
           <p:nvPr/>
         </p:nvSpPr>
@@ -29699,32 +29994,47 @@
       </p:sp>
       <p:sp>
         <p:nvSpPr>
-          <p:cNvPr id="19" name="Shape 17"/>
-          <p:cNvSpPr/>
-          <p:nvPr/>
-        </p:nvSpPr>
-        <p:spPr>
-          <a:xfrm>
-            <a:off x="4842434" y="3383280"/>
-            <a:ext cx="270434" cy="0"/>
-          </a:xfrm>
-          <a:prstGeom prst="line">
-            <a:avLst/>
-          </a:prstGeom>
-          <a:noFill/>
-          <a:ln w="19050">
-            <a:solidFill>
-              <a:srgbClr val="3B3E4A"/>
-            </a:solidFill>
-            <a:prstDash val="solid"/>
-            <a:headEnd type="none"/>
-            <a:tailEnd type="triangle"/>
-          </a:ln>
-        </p:spPr>
-      </p:sp>
-      <p:sp>
-        <p:nvSpPr>
           <p:cNvPr id="20" name="Shape 18"/>
+          <p:cNvSpPr/>
+          <p:nvPr/>
+        </p:nvSpPr>
+        <p:spPr>
+          <a:xfrm>
+            <a:off x="4842434" y="3373755"/>
+            <a:ext cx="188138" cy="19050"/>
+          </a:xfrm>
+          <a:prstGeom prst="rect">
+            <a:avLst/>
+          </a:prstGeom>
+          <a:solidFill>
+            <a:srgbClr val="3B3E4A"/>
+          </a:solidFill>
+          <a:ln/>
+        </p:spPr>
+      </p:sp>
+      <p:sp>
+        <p:nvSpPr>
+          <p:cNvPr id="21" name="Shape 19"/>
+          <p:cNvSpPr/>
+          <p:nvPr/>
+        </p:nvSpPr>
+        <p:spPr>
+          <a:xfrm rot="5400000">
+            <a:off x="4985995" y="3314700"/>
+            <a:ext cx="116586" cy="137160"/>
+          </a:xfrm>
+          <a:prstGeom prst="triangle">
+            <a:avLst/>
+          </a:prstGeom>
+          <a:solidFill>
+            <a:srgbClr val="3B3E4A"/>
+          </a:solidFill>
+          <a:ln/>
+        </p:spPr>
+      </p:sp>
+      <p:sp>
+        <p:nvSpPr>
+          <p:cNvPr id="22" name="Shape 20"/>
           <p:cNvSpPr/>
           <p:nvPr/>
         </p:nvSpPr>
@@ -29751,7 +30061,7 @@
       </p:sp>
       <p:sp>
         <p:nvSpPr>
-          <p:cNvPr id="21" name="Text 19"/>
+          <p:cNvPr id="23" name="Text 21"/>
           <p:cNvSpPr/>
           <p:nvPr/>
         </p:nvSpPr>
@@ -29790,7 +30100,7 @@
       </p:sp>
       <p:sp>
         <p:nvSpPr>
-          <p:cNvPr id="22" name="Text 20"/>
+          <p:cNvPr id="24" name="Text 22"/>
           <p:cNvSpPr/>
           <p:nvPr/>
         </p:nvSpPr>
@@ -29829,7 +30139,7 @@
       </p:sp>
       <p:sp>
         <p:nvSpPr>
-          <p:cNvPr id="23" name="Text 21"/>
+          <p:cNvPr id="25" name="Text 23"/>
           <p:cNvSpPr/>
           <p:nvPr/>
         </p:nvSpPr>
@@ -29868,32 +30178,47 @@
       </p:sp>
       <p:sp>
         <p:nvSpPr>
-          <p:cNvPr id="24" name="Shape 22"/>
-          <p:cNvSpPr/>
-          <p:nvPr/>
-        </p:nvSpPr>
-        <p:spPr>
-          <a:xfrm>
-            <a:off x="7078828" y="3383280"/>
-            <a:ext cx="270434" cy="0"/>
-          </a:xfrm>
-          <a:prstGeom prst="line">
-            <a:avLst/>
-          </a:prstGeom>
-          <a:noFill/>
-          <a:ln w="19050">
-            <a:solidFill>
-              <a:srgbClr val="3B3E4A"/>
-            </a:solidFill>
-            <a:prstDash val="solid"/>
-            <a:headEnd type="none"/>
-            <a:tailEnd type="triangle"/>
-          </a:ln>
-        </p:spPr>
-      </p:sp>
-      <p:sp>
-        <p:nvSpPr>
-          <p:cNvPr id="25" name="Shape 23"/>
+          <p:cNvPr id="26" name="Shape 24"/>
+          <p:cNvSpPr/>
+          <p:nvPr/>
+        </p:nvSpPr>
+        <p:spPr>
+          <a:xfrm>
+            <a:off x="7078828" y="3373755"/>
+            <a:ext cx="188138" cy="19050"/>
+          </a:xfrm>
+          <a:prstGeom prst="rect">
+            <a:avLst/>
+          </a:prstGeom>
+          <a:solidFill>
+            <a:srgbClr val="3B3E4A"/>
+          </a:solidFill>
+          <a:ln/>
+        </p:spPr>
+      </p:sp>
+      <p:sp>
+        <p:nvSpPr>
+          <p:cNvPr id="27" name="Shape 25"/>
+          <p:cNvSpPr/>
+          <p:nvPr/>
+        </p:nvSpPr>
+        <p:spPr>
+          <a:xfrm rot="5400000">
+            <a:off x="7222388" y="3314700"/>
+            <a:ext cx="116586" cy="137160"/>
+          </a:xfrm>
+          <a:prstGeom prst="triangle">
+            <a:avLst/>
+          </a:prstGeom>
+          <a:solidFill>
+            <a:srgbClr val="3B3E4A"/>
+          </a:solidFill>
+          <a:ln/>
+        </p:spPr>
+      </p:sp>
+      <p:sp>
+        <p:nvSpPr>
+          <p:cNvPr id="28" name="Shape 26"/>
           <p:cNvSpPr/>
           <p:nvPr/>
         </p:nvSpPr>
@@ -29920,7 +30245,7 @@
       </p:sp>
       <p:sp>
         <p:nvSpPr>
-          <p:cNvPr id="26" name="Text 24"/>
+          <p:cNvPr id="29" name="Text 27"/>
           <p:cNvSpPr/>
           <p:nvPr/>
         </p:nvSpPr>
@@ -29959,7 +30284,7 @@
       </p:sp>
       <p:sp>
         <p:nvSpPr>
-          <p:cNvPr id="27" name="Text 25"/>
+          <p:cNvPr id="30" name="Text 28"/>
           <p:cNvSpPr/>
           <p:nvPr/>
         </p:nvSpPr>
@@ -29998,7 +30323,7 @@
       </p:sp>
       <p:sp>
         <p:nvSpPr>
-          <p:cNvPr id="28" name="Text 26"/>
+          <p:cNvPr id="31" name="Text 29"/>
           <p:cNvSpPr/>
           <p:nvPr/>
         </p:nvSpPr>
@@ -30037,32 +30362,47 @@
       </p:sp>
       <p:sp>
         <p:nvSpPr>
-          <p:cNvPr id="29" name="Shape 27"/>
-          <p:cNvSpPr/>
-          <p:nvPr/>
-        </p:nvSpPr>
-        <p:spPr>
-          <a:xfrm>
-            <a:off x="9315221" y="3383280"/>
-            <a:ext cx="270434" cy="0"/>
-          </a:xfrm>
-          <a:prstGeom prst="line">
-            <a:avLst/>
-          </a:prstGeom>
-          <a:noFill/>
-          <a:ln w="19050">
-            <a:solidFill>
-              <a:srgbClr val="3B3E4A"/>
-            </a:solidFill>
-            <a:prstDash val="solid"/>
-            <a:headEnd type="none"/>
-            <a:tailEnd type="triangle"/>
-          </a:ln>
-        </p:spPr>
-      </p:sp>
-      <p:sp>
-        <p:nvSpPr>
-          <p:cNvPr id="30" name="Shape 28"/>
+          <p:cNvPr id="32" name="Shape 30"/>
+          <p:cNvSpPr/>
+          <p:nvPr/>
+        </p:nvSpPr>
+        <p:spPr>
+          <a:xfrm>
+            <a:off x="9315221" y="3373755"/>
+            <a:ext cx="188138" cy="19050"/>
+          </a:xfrm>
+          <a:prstGeom prst="rect">
+            <a:avLst/>
+          </a:prstGeom>
+          <a:solidFill>
+            <a:srgbClr val="3B3E4A"/>
+          </a:solidFill>
+          <a:ln/>
+        </p:spPr>
+      </p:sp>
+      <p:sp>
+        <p:nvSpPr>
+          <p:cNvPr id="33" name="Shape 31"/>
+          <p:cNvSpPr/>
+          <p:nvPr/>
+        </p:nvSpPr>
+        <p:spPr>
+          <a:xfrm rot="5400000">
+            <a:off x="9458782" y="3314700"/>
+            <a:ext cx="116586" cy="137160"/>
+          </a:xfrm>
+          <a:prstGeom prst="triangle">
+            <a:avLst/>
+          </a:prstGeom>
+          <a:solidFill>
+            <a:srgbClr val="3B3E4A"/>
+          </a:solidFill>
+          <a:ln/>
+        </p:spPr>
+      </p:sp>
+      <p:sp>
+        <p:nvSpPr>
+          <p:cNvPr id="34" name="Shape 32"/>
           <p:cNvSpPr/>
           <p:nvPr/>
         </p:nvSpPr>
@@ -30089,7 +30429,7 @@
       </p:sp>
       <p:sp>
         <p:nvSpPr>
-          <p:cNvPr id="31" name="Text 29"/>
+          <p:cNvPr id="35" name="Text 33"/>
           <p:cNvSpPr/>
           <p:nvPr/>
         </p:nvSpPr>
@@ -30128,7 +30468,7 @@
       </p:sp>
       <p:sp>
         <p:nvSpPr>
-          <p:cNvPr id="32" name="Text 30"/>
+          <p:cNvPr id="36" name="Text 34"/>
           <p:cNvSpPr/>
           <p:nvPr/>
         </p:nvSpPr>
@@ -30167,7 +30507,7 @@
       </p:sp>
       <p:sp>
         <p:nvSpPr>
-          <p:cNvPr id="33" name="Text 31"/>
+          <p:cNvPr id="37" name="Text 35"/>
           <p:cNvSpPr/>
           <p:nvPr/>
         </p:nvSpPr>
@@ -30206,7 +30546,7 @@
       </p:sp>
       <p:sp>
         <p:nvSpPr>
-          <p:cNvPr id="34" name="Shape 32"/>
+          <p:cNvPr id="38" name="Shape 36"/>
           <p:cNvSpPr/>
           <p:nvPr/>
         </p:nvSpPr>
@@ -30233,7 +30573,7 @@
       </p:sp>
       <p:sp>
         <p:nvSpPr>
-          <p:cNvPr id="35" name="Shape 33"/>
+          <p:cNvPr id="39" name="Shape 37"/>
           <p:cNvSpPr/>
           <p:nvPr/>
         </p:nvSpPr>
@@ -30253,7 +30593,7 @@
       </p:sp>
       <p:sp>
         <p:nvSpPr>
-          <p:cNvPr id="36" name="Text 34"/>
+          <p:cNvPr id="40" name="Text 38"/>
           <p:cNvSpPr/>
           <p:nvPr/>
         </p:nvSpPr>
@@ -30292,7 +30632,7 @@
       </p:sp>
       <p:sp>
         <p:nvSpPr>
-          <p:cNvPr id="37" name="Text 35"/>
+          <p:cNvPr id="41" name="Text 39"/>
           <p:cNvSpPr/>
           <p:nvPr/>
         </p:nvSpPr>
@@ -30512,21 +30852,16 @@
         </p:nvSpPr>
         <p:spPr>
           <a:xfrm>
-            <a:off x="640080" y="6419088"/>
-            <a:ext cx="10911535" cy="0"/>
-          </a:xfrm>
-          <a:prstGeom prst="line">
-            <a:avLst/>
-          </a:prstGeom>
-          <a:noFill/>
-          <a:ln w="9525">
-            <a:solidFill>
-              <a:srgbClr val="2A2C35"/>
-            </a:solidFill>
-            <a:prstDash val="solid"/>
-            <a:headEnd type="none"/>
-            <a:tailEnd type="none"/>
-          </a:ln>
+            <a:off x="640080" y="6413602"/>
+            <a:ext cx="10911535" cy="10973"/>
+          </a:xfrm>
+          <a:prstGeom prst="rect">
+            <a:avLst/>
+          </a:prstGeom>
+          <a:solidFill>
+            <a:srgbClr val="2A2C35"/>
+          </a:solidFill>
+          <a:ln/>
         </p:spPr>
       </p:sp>
       <p:sp>
@@ -30802,26 +31137,41 @@
         </p:nvSpPr>
         <p:spPr>
           <a:xfrm>
-            <a:off x="3154680" y="3474720"/>
-            <a:ext cx="284378" cy="0"/>
-          </a:xfrm>
-          <a:prstGeom prst="line">
-            <a:avLst/>
-          </a:prstGeom>
-          <a:noFill/>
-          <a:ln w="19050">
-            <a:solidFill>
-              <a:srgbClr val="9AA0AC"/>
-            </a:solidFill>
-            <a:prstDash val="solid"/>
-            <a:headEnd type="none"/>
-            <a:tailEnd type="triangle"/>
-          </a:ln>
+            <a:off x="3154680" y="3465195"/>
+            <a:ext cx="202082" cy="19050"/>
+          </a:xfrm>
+          <a:prstGeom prst="rect">
+            <a:avLst/>
+          </a:prstGeom>
+          <a:solidFill>
+            <a:srgbClr val="9AA0AC"/>
+          </a:solidFill>
+          <a:ln/>
         </p:spPr>
       </p:sp>
       <p:sp>
         <p:nvSpPr>
           <p:cNvPr id="15" name="Shape 13"/>
+          <p:cNvSpPr/>
+          <p:nvPr/>
+        </p:nvSpPr>
+        <p:spPr>
+          <a:xfrm rot="5400000">
+            <a:off x="3312185" y="3406140"/>
+            <a:ext cx="116586" cy="137160"/>
+          </a:xfrm>
+          <a:prstGeom prst="triangle">
+            <a:avLst/>
+          </a:prstGeom>
+          <a:solidFill>
+            <a:srgbClr val="9AA0AC"/>
+          </a:solidFill>
+          <a:ln/>
+        </p:spPr>
+      </p:sp>
+      <p:sp>
+        <p:nvSpPr>
+          <p:cNvPr id="16" name="Shape 14"/>
           <p:cNvSpPr/>
           <p:nvPr/>
         </p:nvSpPr>
@@ -30848,7 +31198,7 @@
       </p:sp>
       <p:sp>
         <p:nvSpPr>
-          <p:cNvPr id="16" name="Shape 14"/>
+          <p:cNvPr id="17" name="Shape 15"/>
           <p:cNvSpPr/>
           <p:nvPr/>
         </p:nvSpPr>
@@ -30868,7 +31218,7 @@
       </p:sp>
       <p:sp>
         <p:nvSpPr>
-          <p:cNvPr id="17" name="Text 15"/>
+          <p:cNvPr id="18" name="Text 16"/>
           <p:cNvSpPr/>
           <p:nvPr/>
         </p:nvSpPr>
@@ -30907,7 +31257,7 @@
       </p:sp>
       <p:sp>
         <p:nvSpPr>
-          <p:cNvPr id="18" name="Text 16"/>
+          <p:cNvPr id="19" name="Text 17"/>
           <p:cNvSpPr/>
           <p:nvPr/>
         </p:nvSpPr>
@@ -30969,32 +31319,47 @@
       </p:sp>
       <p:sp>
         <p:nvSpPr>
-          <p:cNvPr id="19" name="Shape 17"/>
-          <p:cNvSpPr/>
-          <p:nvPr/>
-        </p:nvSpPr>
-        <p:spPr>
-          <a:xfrm>
-            <a:off x="5953658" y="3474720"/>
-            <a:ext cx="284378" cy="0"/>
-          </a:xfrm>
-          <a:prstGeom prst="line">
-            <a:avLst/>
-          </a:prstGeom>
-          <a:noFill/>
-          <a:ln w="19050">
-            <a:solidFill>
-              <a:srgbClr val="9AA0AC"/>
-            </a:solidFill>
-            <a:prstDash val="solid"/>
-            <a:headEnd type="none"/>
-            <a:tailEnd type="triangle"/>
-          </a:ln>
-        </p:spPr>
-      </p:sp>
-      <p:sp>
-        <p:nvSpPr>
           <p:cNvPr id="20" name="Shape 18"/>
+          <p:cNvSpPr/>
+          <p:nvPr/>
+        </p:nvSpPr>
+        <p:spPr>
+          <a:xfrm>
+            <a:off x="5953658" y="3465195"/>
+            <a:ext cx="202082" cy="19050"/>
+          </a:xfrm>
+          <a:prstGeom prst="rect">
+            <a:avLst/>
+          </a:prstGeom>
+          <a:solidFill>
+            <a:srgbClr val="9AA0AC"/>
+          </a:solidFill>
+          <a:ln/>
+        </p:spPr>
+      </p:sp>
+      <p:sp>
+        <p:nvSpPr>
+          <p:cNvPr id="21" name="Shape 19"/>
+          <p:cNvSpPr/>
+          <p:nvPr/>
+        </p:nvSpPr>
+        <p:spPr>
+          <a:xfrm rot="5400000">
+            <a:off x="6111164" y="3406140"/>
+            <a:ext cx="116586" cy="137160"/>
+          </a:xfrm>
+          <a:prstGeom prst="triangle">
+            <a:avLst/>
+          </a:prstGeom>
+          <a:solidFill>
+            <a:srgbClr val="9AA0AC"/>
+          </a:solidFill>
+          <a:ln/>
+        </p:spPr>
+      </p:sp>
+      <p:sp>
+        <p:nvSpPr>
+          <p:cNvPr id="22" name="Shape 20"/>
           <p:cNvSpPr/>
           <p:nvPr/>
         </p:nvSpPr>
@@ -31021,7 +31386,7 @@
       </p:sp>
       <p:sp>
         <p:nvSpPr>
-          <p:cNvPr id="21" name="Shape 19"/>
+          <p:cNvPr id="23" name="Shape 21"/>
           <p:cNvSpPr/>
           <p:nvPr/>
         </p:nvSpPr>
@@ -31041,7 +31406,7 @@
       </p:sp>
       <p:sp>
         <p:nvSpPr>
-          <p:cNvPr id="22" name="Text 20"/>
+          <p:cNvPr id="24" name="Text 22"/>
           <p:cNvSpPr/>
           <p:nvPr/>
         </p:nvSpPr>
@@ -31080,7 +31445,7 @@
       </p:sp>
       <p:sp>
         <p:nvSpPr>
-          <p:cNvPr id="23" name="Text 21"/>
+          <p:cNvPr id="25" name="Text 23"/>
           <p:cNvSpPr/>
           <p:nvPr/>
         </p:nvSpPr>
@@ -31142,32 +31507,47 @@
       </p:sp>
       <p:sp>
         <p:nvSpPr>
-          <p:cNvPr id="24" name="Shape 22"/>
-          <p:cNvSpPr/>
-          <p:nvPr/>
-        </p:nvSpPr>
-        <p:spPr>
-          <a:xfrm>
-            <a:off x="8752637" y="3474720"/>
-            <a:ext cx="284378" cy="0"/>
-          </a:xfrm>
-          <a:prstGeom prst="line">
-            <a:avLst/>
-          </a:prstGeom>
-          <a:noFill/>
-          <a:ln w="19050">
-            <a:solidFill>
-              <a:srgbClr val="9AA0AC"/>
-            </a:solidFill>
-            <a:prstDash val="solid"/>
-            <a:headEnd type="none"/>
-            <a:tailEnd type="triangle"/>
-          </a:ln>
-        </p:spPr>
-      </p:sp>
-      <p:sp>
-        <p:nvSpPr>
-          <p:cNvPr id="25" name="Shape 23"/>
+          <p:cNvPr id="26" name="Shape 24"/>
+          <p:cNvSpPr/>
+          <p:nvPr/>
+        </p:nvSpPr>
+        <p:spPr>
+          <a:xfrm>
+            <a:off x="8752637" y="3465195"/>
+            <a:ext cx="202082" cy="19050"/>
+          </a:xfrm>
+          <a:prstGeom prst="rect">
+            <a:avLst/>
+          </a:prstGeom>
+          <a:solidFill>
+            <a:srgbClr val="9AA0AC"/>
+          </a:solidFill>
+          <a:ln/>
+        </p:spPr>
+      </p:sp>
+      <p:sp>
+        <p:nvSpPr>
+          <p:cNvPr id="27" name="Shape 25"/>
+          <p:cNvSpPr/>
+          <p:nvPr/>
+        </p:nvSpPr>
+        <p:spPr>
+          <a:xfrm rot="5400000">
+            <a:off x="8910142" y="3406140"/>
+            <a:ext cx="116586" cy="137160"/>
+          </a:xfrm>
+          <a:prstGeom prst="triangle">
+            <a:avLst/>
+          </a:prstGeom>
+          <a:solidFill>
+            <a:srgbClr val="9AA0AC"/>
+          </a:solidFill>
+          <a:ln/>
+        </p:spPr>
+      </p:sp>
+      <p:sp>
+        <p:nvSpPr>
+          <p:cNvPr id="28" name="Shape 26"/>
           <p:cNvSpPr/>
           <p:nvPr/>
         </p:nvSpPr>
@@ -31194,7 +31574,7 @@
       </p:sp>
       <p:sp>
         <p:nvSpPr>
-          <p:cNvPr id="26" name="Shape 24"/>
+          <p:cNvPr id="29" name="Shape 27"/>
           <p:cNvSpPr/>
           <p:nvPr/>
         </p:nvSpPr>
@@ -31214,7 +31594,7 @@
       </p:sp>
       <p:sp>
         <p:nvSpPr>
-          <p:cNvPr id="27" name="Text 25"/>
+          <p:cNvPr id="30" name="Text 28"/>
           <p:cNvSpPr/>
           <p:nvPr/>
         </p:nvSpPr>
@@ -31253,7 +31633,7 @@
       </p:sp>
       <p:sp>
         <p:nvSpPr>
-          <p:cNvPr id="28" name="Text 26"/>
+          <p:cNvPr id="31" name="Text 29"/>
           <p:cNvSpPr/>
           <p:nvPr/>
         </p:nvSpPr>
@@ -31315,7 +31695,7 @@
       </p:sp>
       <p:sp>
         <p:nvSpPr>
-          <p:cNvPr id="29" name="Text 27"/>
+          <p:cNvPr id="32" name="Text 30"/>
           <p:cNvSpPr/>
           <p:nvPr/>
         </p:nvSpPr>
@@ -31354,7 +31734,7 @@
       </p:sp>
       <p:sp>
         <p:nvSpPr>
-          <p:cNvPr id="30" name="Text 28"/>
+          <p:cNvPr id="33" name="Text 31"/>
           <p:cNvSpPr/>
           <p:nvPr/>
         </p:nvSpPr>
@@ -31574,21 +31954,16 @@
         </p:nvSpPr>
         <p:spPr>
           <a:xfrm>
-            <a:off x="640080" y="6419088"/>
-            <a:ext cx="10911535" cy="0"/>
-          </a:xfrm>
-          <a:prstGeom prst="line">
-            <a:avLst/>
-          </a:prstGeom>
-          <a:noFill/>
-          <a:ln w="9525">
-            <a:solidFill>
-              <a:srgbClr val="2A2C35"/>
-            </a:solidFill>
-            <a:prstDash val="solid"/>
-            <a:headEnd type="none"/>
-            <a:tailEnd type="none"/>
-          </a:ln>
+            <a:off x="640080" y="6413602"/>
+            <a:ext cx="10911535" cy="10973"/>
+          </a:xfrm>
+          <a:prstGeom prst="rect">
+            <a:avLst/>
+          </a:prstGeom>
+          <a:solidFill>
+            <a:srgbClr val="2A2C35"/>
+          </a:solidFill>
+          <a:ln/>
         </p:spPr>
       </p:sp>
       <p:sp>
@@ -32445,21 +32820,16 @@
         </p:nvSpPr>
         <p:spPr>
           <a:xfrm>
-            <a:off x="640080" y="6419088"/>
-            <a:ext cx="10911535" cy="0"/>
-          </a:xfrm>
-          <a:prstGeom prst="line">
-            <a:avLst/>
-          </a:prstGeom>
-          <a:noFill/>
-          <a:ln w="9525">
-            <a:solidFill>
-              <a:srgbClr val="2A2C35"/>
-            </a:solidFill>
-            <a:prstDash val="solid"/>
-            <a:headEnd type="none"/>
-            <a:tailEnd type="none"/>
-          </a:ln>
+            <a:off x="640080" y="6413602"/>
+            <a:ext cx="10911535" cy="10973"/>
+          </a:xfrm>
+          <a:prstGeom prst="rect">
+            <a:avLst/>
+          </a:prstGeom>
+          <a:solidFill>
+            <a:srgbClr val="2A2C35"/>
+          </a:solidFill>
+          <a:ln/>
         </p:spPr>
       </p:sp>
       <p:sp>
@@ -33395,21 +33765,16 @@
         </p:nvSpPr>
         <p:spPr>
           <a:xfrm>
-            <a:off x="640080" y="6419088"/>
-            <a:ext cx="10911535" cy="0"/>
-          </a:xfrm>
-          <a:prstGeom prst="line">
-            <a:avLst/>
-          </a:prstGeom>
-          <a:noFill/>
-          <a:ln w="9525">
-            <a:solidFill>
-              <a:srgbClr val="2A2C35"/>
-            </a:solidFill>
-            <a:prstDash val="solid"/>
-            <a:headEnd type="none"/>
-            <a:tailEnd type="none"/>
-          </a:ln>
+            <a:off x="640080" y="6413602"/>
+            <a:ext cx="10911535" cy="10973"/>
+          </a:xfrm>
+          <a:prstGeom prst="rect">
+            <a:avLst/>
+          </a:prstGeom>
+          <a:solidFill>
+            <a:srgbClr val="2A2C35"/>
+          </a:solidFill>
+          <a:ln/>
         </p:spPr>
       </p:sp>
       <p:sp>
@@ -33665,26 +34030,41 @@
         </p:nvSpPr>
         <p:spPr>
           <a:xfrm>
-            <a:off x="2606040" y="3429000"/>
-            <a:ext cx="270434" cy="0"/>
-          </a:xfrm>
-          <a:prstGeom prst="line">
-            <a:avLst/>
-          </a:prstGeom>
-          <a:noFill/>
-          <a:ln w="19050">
-            <a:solidFill>
-              <a:srgbClr val="3B3E4A"/>
-            </a:solidFill>
-            <a:prstDash val="solid"/>
-            <a:headEnd type="none"/>
-            <a:tailEnd type="triangle"/>
-          </a:ln>
+            <a:off x="2606040" y="3419475"/>
+            <a:ext cx="188138" cy="19050"/>
+          </a:xfrm>
+          <a:prstGeom prst="rect">
+            <a:avLst/>
+          </a:prstGeom>
+          <a:solidFill>
+            <a:srgbClr val="3B3E4A"/>
+          </a:solidFill>
+          <a:ln/>
         </p:spPr>
       </p:sp>
       <p:sp>
         <p:nvSpPr>
           <p:cNvPr id="14" name="Shape 12"/>
+          <p:cNvSpPr/>
+          <p:nvPr/>
+        </p:nvSpPr>
+        <p:spPr>
+          <a:xfrm rot="5400000">
+            <a:off x="2749601" y="3360420"/>
+            <a:ext cx="116586" cy="137160"/>
+          </a:xfrm>
+          <a:prstGeom prst="triangle">
+            <a:avLst/>
+          </a:prstGeom>
+          <a:solidFill>
+            <a:srgbClr val="3B3E4A"/>
+          </a:solidFill>
+          <a:ln/>
+        </p:spPr>
+      </p:sp>
+      <p:sp>
+        <p:nvSpPr>
+          <p:cNvPr id="15" name="Shape 13"/>
           <p:cNvSpPr/>
           <p:nvPr/>
         </p:nvSpPr>
@@ -33711,7 +34091,7 @@
       </p:sp>
       <p:sp>
         <p:nvSpPr>
-          <p:cNvPr id="15" name="Text 13"/>
+          <p:cNvPr id="16" name="Text 14"/>
           <p:cNvSpPr/>
           <p:nvPr/>
         </p:nvSpPr>
@@ -33750,7 +34130,7 @@
       </p:sp>
       <p:sp>
         <p:nvSpPr>
-          <p:cNvPr id="16" name="Text 14"/>
+          <p:cNvPr id="17" name="Text 15"/>
           <p:cNvSpPr/>
           <p:nvPr/>
         </p:nvSpPr>
@@ -33812,32 +34192,47 @@
       </p:sp>
       <p:sp>
         <p:nvSpPr>
-          <p:cNvPr id="17" name="Shape 15"/>
-          <p:cNvSpPr/>
-          <p:nvPr/>
-        </p:nvSpPr>
-        <p:spPr>
-          <a:xfrm>
-            <a:off x="4842434" y="3429000"/>
-            <a:ext cx="270434" cy="0"/>
-          </a:xfrm>
-          <a:prstGeom prst="line">
-            <a:avLst/>
-          </a:prstGeom>
-          <a:noFill/>
-          <a:ln w="19050">
-            <a:solidFill>
-              <a:srgbClr val="3B3E4A"/>
-            </a:solidFill>
-            <a:prstDash val="solid"/>
-            <a:headEnd type="none"/>
-            <a:tailEnd type="triangle"/>
-          </a:ln>
-        </p:spPr>
-      </p:sp>
-      <p:sp>
-        <p:nvSpPr>
           <p:cNvPr id="18" name="Shape 16"/>
+          <p:cNvSpPr/>
+          <p:nvPr/>
+        </p:nvSpPr>
+        <p:spPr>
+          <a:xfrm>
+            <a:off x="4842434" y="3419475"/>
+            <a:ext cx="188138" cy="19050"/>
+          </a:xfrm>
+          <a:prstGeom prst="rect">
+            <a:avLst/>
+          </a:prstGeom>
+          <a:solidFill>
+            <a:srgbClr val="3B3E4A"/>
+          </a:solidFill>
+          <a:ln/>
+        </p:spPr>
+      </p:sp>
+      <p:sp>
+        <p:nvSpPr>
+          <p:cNvPr id="19" name="Shape 17"/>
+          <p:cNvSpPr/>
+          <p:nvPr/>
+        </p:nvSpPr>
+        <p:spPr>
+          <a:xfrm rot="5400000">
+            <a:off x="4985995" y="3360420"/>
+            <a:ext cx="116586" cy="137160"/>
+          </a:xfrm>
+          <a:prstGeom prst="triangle">
+            <a:avLst/>
+          </a:prstGeom>
+          <a:solidFill>
+            <a:srgbClr val="3B3E4A"/>
+          </a:solidFill>
+          <a:ln/>
+        </p:spPr>
+      </p:sp>
+      <p:sp>
+        <p:nvSpPr>
+          <p:cNvPr id="20" name="Shape 18"/>
           <p:cNvSpPr/>
           <p:nvPr/>
         </p:nvSpPr>
@@ -33864,7 +34259,7 @@
       </p:sp>
       <p:sp>
         <p:nvSpPr>
-          <p:cNvPr id="19" name="Text 17"/>
+          <p:cNvPr id="21" name="Text 19"/>
           <p:cNvSpPr/>
           <p:nvPr/>
         </p:nvSpPr>
@@ -33903,7 +34298,7 @@
       </p:sp>
       <p:sp>
         <p:nvSpPr>
-          <p:cNvPr id="20" name="Text 18"/>
+          <p:cNvPr id="22" name="Text 20"/>
           <p:cNvSpPr/>
           <p:nvPr/>
         </p:nvSpPr>
@@ -33965,32 +34360,47 @@
       </p:sp>
       <p:sp>
         <p:nvSpPr>
-          <p:cNvPr id="21" name="Shape 19"/>
-          <p:cNvSpPr/>
-          <p:nvPr/>
-        </p:nvSpPr>
-        <p:spPr>
-          <a:xfrm>
-            <a:off x="7078828" y="3429000"/>
-            <a:ext cx="270434" cy="0"/>
-          </a:xfrm>
-          <a:prstGeom prst="line">
-            <a:avLst/>
-          </a:prstGeom>
-          <a:noFill/>
-          <a:ln w="19050">
-            <a:solidFill>
-              <a:srgbClr val="3B3E4A"/>
-            </a:solidFill>
-            <a:prstDash val="solid"/>
-            <a:headEnd type="none"/>
-            <a:tailEnd type="triangle"/>
-          </a:ln>
-        </p:spPr>
-      </p:sp>
-      <p:sp>
-        <p:nvSpPr>
-          <p:cNvPr id="22" name="Shape 20"/>
+          <p:cNvPr id="23" name="Shape 21"/>
+          <p:cNvSpPr/>
+          <p:nvPr/>
+        </p:nvSpPr>
+        <p:spPr>
+          <a:xfrm>
+            <a:off x="7078828" y="3419475"/>
+            <a:ext cx="188138" cy="19050"/>
+          </a:xfrm>
+          <a:prstGeom prst="rect">
+            <a:avLst/>
+          </a:prstGeom>
+          <a:solidFill>
+            <a:srgbClr val="3B3E4A"/>
+          </a:solidFill>
+          <a:ln/>
+        </p:spPr>
+      </p:sp>
+      <p:sp>
+        <p:nvSpPr>
+          <p:cNvPr id="24" name="Shape 22"/>
+          <p:cNvSpPr/>
+          <p:nvPr/>
+        </p:nvSpPr>
+        <p:spPr>
+          <a:xfrm rot="5400000">
+            <a:off x="7222388" y="3360420"/>
+            <a:ext cx="116586" cy="137160"/>
+          </a:xfrm>
+          <a:prstGeom prst="triangle">
+            <a:avLst/>
+          </a:prstGeom>
+          <a:solidFill>
+            <a:srgbClr val="3B3E4A"/>
+          </a:solidFill>
+          <a:ln/>
+        </p:spPr>
+      </p:sp>
+      <p:sp>
+        <p:nvSpPr>
+          <p:cNvPr id="25" name="Shape 23"/>
           <p:cNvSpPr/>
           <p:nvPr/>
         </p:nvSpPr>
@@ -34017,7 +34427,7 @@
       </p:sp>
       <p:sp>
         <p:nvSpPr>
-          <p:cNvPr id="23" name="Text 21"/>
+          <p:cNvPr id="26" name="Text 24"/>
           <p:cNvSpPr/>
           <p:nvPr/>
         </p:nvSpPr>
@@ -34056,7 +34466,7 @@
       </p:sp>
       <p:sp>
         <p:nvSpPr>
-          <p:cNvPr id="24" name="Text 22"/>
+          <p:cNvPr id="27" name="Text 25"/>
           <p:cNvSpPr/>
           <p:nvPr/>
         </p:nvSpPr>
@@ -34118,32 +34528,47 @@
       </p:sp>
       <p:sp>
         <p:nvSpPr>
-          <p:cNvPr id="25" name="Shape 23"/>
-          <p:cNvSpPr/>
-          <p:nvPr/>
-        </p:nvSpPr>
-        <p:spPr>
-          <a:xfrm>
-            <a:off x="9315221" y="3429000"/>
-            <a:ext cx="270434" cy="0"/>
-          </a:xfrm>
-          <a:prstGeom prst="line">
-            <a:avLst/>
-          </a:prstGeom>
-          <a:noFill/>
-          <a:ln w="19050">
-            <a:solidFill>
-              <a:srgbClr val="3B3E4A"/>
-            </a:solidFill>
-            <a:prstDash val="solid"/>
-            <a:headEnd type="none"/>
-            <a:tailEnd type="triangle"/>
-          </a:ln>
-        </p:spPr>
-      </p:sp>
-      <p:sp>
-        <p:nvSpPr>
-          <p:cNvPr id="26" name="Shape 24"/>
+          <p:cNvPr id="28" name="Shape 26"/>
+          <p:cNvSpPr/>
+          <p:nvPr/>
+        </p:nvSpPr>
+        <p:spPr>
+          <a:xfrm>
+            <a:off x="9315221" y="3419475"/>
+            <a:ext cx="188138" cy="19050"/>
+          </a:xfrm>
+          <a:prstGeom prst="rect">
+            <a:avLst/>
+          </a:prstGeom>
+          <a:solidFill>
+            <a:srgbClr val="3B3E4A"/>
+          </a:solidFill>
+          <a:ln/>
+        </p:spPr>
+      </p:sp>
+      <p:sp>
+        <p:nvSpPr>
+          <p:cNvPr id="29" name="Shape 27"/>
+          <p:cNvSpPr/>
+          <p:nvPr/>
+        </p:nvSpPr>
+        <p:spPr>
+          <a:xfrm rot="5400000">
+            <a:off x="9458782" y="3360420"/>
+            <a:ext cx="116586" cy="137160"/>
+          </a:xfrm>
+          <a:prstGeom prst="triangle">
+            <a:avLst/>
+          </a:prstGeom>
+          <a:solidFill>
+            <a:srgbClr val="3B3E4A"/>
+          </a:solidFill>
+          <a:ln/>
+        </p:spPr>
+      </p:sp>
+      <p:sp>
+        <p:nvSpPr>
+          <p:cNvPr id="30" name="Shape 28"/>
           <p:cNvSpPr/>
           <p:nvPr/>
         </p:nvSpPr>
@@ -34170,7 +34595,7 @@
       </p:sp>
       <p:sp>
         <p:nvSpPr>
-          <p:cNvPr id="27" name="Text 25"/>
+          <p:cNvPr id="31" name="Text 29"/>
           <p:cNvSpPr/>
           <p:nvPr/>
         </p:nvSpPr>
@@ -34209,7 +34634,7 @@
       </p:sp>
       <p:sp>
         <p:nvSpPr>
-          <p:cNvPr id="28" name="Text 26"/>
+          <p:cNvPr id="32" name="Text 30"/>
           <p:cNvSpPr/>
           <p:nvPr/>
         </p:nvSpPr>
@@ -34271,7 +34696,7 @@
       </p:sp>
       <p:sp>
         <p:nvSpPr>
-          <p:cNvPr id="29" name="Text 27"/>
+          <p:cNvPr id="33" name="Text 31"/>
           <p:cNvSpPr/>
           <p:nvPr/>
         </p:nvSpPr>
@@ -34491,21 +34916,16 @@
         </p:nvSpPr>
         <p:spPr>
           <a:xfrm>
-            <a:off x="640080" y="6419088"/>
-            <a:ext cx="10911535" cy="0"/>
-          </a:xfrm>
-          <a:prstGeom prst="line">
-            <a:avLst/>
-          </a:prstGeom>
-          <a:noFill/>
-          <a:ln w="9525">
-            <a:solidFill>
-              <a:srgbClr val="2A2C35"/>
-            </a:solidFill>
-            <a:prstDash val="solid"/>
-            <a:headEnd type="none"/>
-            <a:tailEnd type="none"/>
-          </a:ln>
+            <a:off x="640080" y="6413602"/>
+            <a:ext cx="10911535" cy="10973"/>
+          </a:xfrm>
+          <a:prstGeom prst="rect">
+            <a:avLst/>
+          </a:prstGeom>
+          <a:solidFill>
+            <a:srgbClr val="2A2C35"/>
+          </a:solidFill>
+          <a:ln/>
         </p:spPr>
       </p:sp>
       <p:sp>
@@ -34840,21 +35260,16 @@
         </p:nvSpPr>
         <p:spPr>
           <a:xfrm>
-            <a:off x="896112" y="4160520"/>
-            <a:ext cx="4864608" cy="0"/>
-          </a:xfrm>
-          <a:prstGeom prst="line">
-            <a:avLst/>
-          </a:prstGeom>
-          <a:noFill/>
-          <a:ln w="12700">
-            <a:solidFill>
-              <a:srgbClr val="2A2C35"/>
-            </a:solidFill>
-            <a:prstDash val="solid"/>
-            <a:headEnd type="none"/>
-            <a:tailEnd type="none"/>
-          </a:ln>
+            <a:off x="896112" y="4154170"/>
+            <a:ext cx="4864608" cy="12700"/>
+          </a:xfrm>
+          <a:prstGeom prst="rect">
+            <a:avLst/>
+          </a:prstGeom>
+          <a:solidFill>
+            <a:srgbClr val="2A2C35"/>
+          </a:solidFill>
+          <a:ln/>
         </p:spPr>
       </p:sp>
       <p:sp>
@@ -35423,21 +35838,16 @@
         </p:nvSpPr>
         <p:spPr>
           <a:xfrm>
-            <a:off x="640080" y="6419088"/>
-            <a:ext cx="10911535" cy="0"/>
-          </a:xfrm>
-          <a:prstGeom prst="line">
-            <a:avLst/>
-          </a:prstGeom>
-          <a:noFill/>
-          <a:ln w="9525">
-            <a:solidFill>
-              <a:srgbClr val="2A2C35"/>
-            </a:solidFill>
-            <a:prstDash val="solid"/>
-            <a:headEnd type="none"/>
-            <a:tailEnd type="none"/>
-          </a:ln>
+            <a:off x="640080" y="6413602"/>
+            <a:ext cx="10911535" cy="10973"/>
+          </a:xfrm>
+          <a:prstGeom prst="rect">
+            <a:avLst/>
+          </a:prstGeom>
+          <a:solidFill>
+            <a:srgbClr val="2A2C35"/>
+          </a:solidFill>
+          <a:ln/>
         </p:spPr>
       </p:sp>
       <p:sp>
@@ -36378,21 +36788,16 @@
         </p:nvSpPr>
         <p:spPr>
           <a:xfrm>
-            <a:off x="640080" y="6419088"/>
-            <a:ext cx="10911535" cy="0"/>
-          </a:xfrm>
-          <a:prstGeom prst="line">
-            <a:avLst/>
-          </a:prstGeom>
-          <a:noFill/>
-          <a:ln w="9525">
-            <a:solidFill>
-              <a:srgbClr val="2A2C35"/>
-            </a:solidFill>
-            <a:prstDash val="solid"/>
-            <a:headEnd type="none"/>
-            <a:tailEnd type="none"/>
-          </a:ln>
+            <a:off x="640080" y="6413602"/>
+            <a:ext cx="10911535" cy="10973"/>
+          </a:xfrm>
+          <a:prstGeom prst="rect">
+            <a:avLst/>
+          </a:prstGeom>
+          <a:solidFill>
+            <a:srgbClr val="2A2C35"/>
+          </a:solidFill>
+          <a:ln/>
         </p:spPr>
       </p:sp>
       <p:sp>
@@ -37595,21 +38000,16 @@
         </p:nvSpPr>
         <p:spPr>
           <a:xfrm>
-            <a:off x="640080" y="6419088"/>
-            <a:ext cx="10911535" cy="0"/>
-          </a:xfrm>
-          <a:prstGeom prst="line">
-            <a:avLst/>
-          </a:prstGeom>
-          <a:noFill/>
-          <a:ln w="9525">
-            <a:solidFill>
-              <a:srgbClr val="2A2C35"/>
-            </a:solidFill>
-            <a:prstDash val="solid"/>
-            <a:headEnd type="none"/>
-            <a:tailEnd type="none"/>
-          </a:ln>
+            <a:off x="640080" y="6413602"/>
+            <a:ext cx="10911535" cy="10973"/>
+          </a:xfrm>
+          <a:prstGeom prst="rect">
+            <a:avLst/>
+          </a:prstGeom>
+          <a:solidFill>
+            <a:srgbClr val="2A2C35"/>
+          </a:solidFill>
+          <a:ln/>
         </p:spPr>
       </p:sp>
       <p:sp>
@@ -37867,21 +38267,16 @@
         </p:nvSpPr>
         <p:spPr>
           <a:xfrm>
-            <a:off x="640080" y="6419088"/>
-            <a:ext cx="10911535" cy="0"/>
-          </a:xfrm>
-          <a:prstGeom prst="line">
-            <a:avLst/>
-          </a:prstGeom>
-          <a:noFill/>
-          <a:ln w="9525">
-            <a:solidFill>
-              <a:srgbClr val="2A2C35"/>
-            </a:solidFill>
-            <a:prstDash val="solid"/>
-            <a:headEnd type="none"/>
-            <a:tailEnd type="none"/>
-          </a:ln>
+            <a:off x="640080" y="6413602"/>
+            <a:ext cx="10911535" cy="10973"/>
+          </a:xfrm>
+          <a:prstGeom prst="rect">
+            <a:avLst/>
+          </a:prstGeom>
+          <a:solidFill>
+            <a:srgbClr val="2A2C35"/>
+          </a:solidFill>
+          <a:ln/>
         </p:spPr>
       </p:sp>
       <p:sp>
@@ -38821,21 +39216,16 @@
         </p:nvSpPr>
         <p:spPr>
           <a:xfrm>
-            <a:off x="640080" y="6419088"/>
-            <a:ext cx="10911535" cy="0"/>
-          </a:xfrm>
-          <a:prstGeom prst="line">
-            <a:avLst/>
-          </a:prstGeom>
-          <a:noFill/>
-          <a:ln w="9525">
-            <a:solidFill>
-              <a:srgbClr val="2A2C35"/>
-            </a:solidFill>
-            <a:prstDash val="solid"/>
-            <a:headEnd type="none"/>
-            <a:tailEnd type="none"/>
-          </a:ln>
+            <a:off x="640080" y="6413602"/>
+            <a:ext cx="10911535" cy="10973"/>
+          </a:xfrm>
+          <a:prstGeom prst="rect">
+            <a:avLst/>
+          </a:prstGeom>
+          <a:solidFill>
+            <a:srgbClr val="2A2C35"/>
+          </a:solidFill>
+          <a:ln/>
         </p:spPr>
       </p:sp>
       <p:sp>
@@ -39789,21 +40179,16 @@
         </p:nvSpPr>
         <p:spPr>
           <a:xfrm>
-            <a:off x="640080" y="6419088"/>
-            <a:ext cx="10911535" cy="0"/>
-          </a:xfrm>
-          <a:prstGeom prst="line">
-            <a:avLst/>
-          </a:prstGeom>
-          <a:noFill/>
-          <a:ln w="9525">
-            <a:solidFill>
-              <a:srgbClr val="2A2C35"/>
-            </a:solidFill>
-            <a:prstDash val="solid"/>
-            <a:headEnd type="none"/>
-            <a:tailEnd type="none"/>
-          </a:ln>
+            <a:off x="640080" y="6413602"/>
+            <a:ext cx="10911535" cy="10973"/>
+          </a:xfrm>
+          <a:prstGeom prst="rect">
+            <a:avLst/>
+          </a:prstGeom>
+          <a:solidFill>
+            <a:srgbClr val="2A2C35"/>
+          </a:solidFill>
+          <a:ln/>
         </p:spPr>
       </p:sp>
       <p:sp>
@@ -40857,21 +41242,16 @@
         </p:nvSpPr>
         <p:spPr>
           <a:xfrm>
-            <a:off x="640080" y="4526280"/>
-            <a:ext cx="4206240" cy="0"/>
-          </a:xfrm>
-          <a:prstGeom prst="line">
-            <a:avLst/>
-          </a:prstGeom>
-          <a:noFill/>
-          <a:ln w="12700">
-            <a:solidFill>
-              <a:srgbClr val="2A2C35"/>
-            </a:solidFill>
-            <a:prstDash val="solid"/>
-            <a:headEnd type="none"/>
-            <a:tailEnd type="none"/>
-          </a:ln>
+            <a:off x="640080" y="4519930"/>
+            <a:ext cx="4206240" cy="12700"/>
+          </a:xfrm>
+          <a:prstGeom prst="rect">
+            <a:avLst/>
+          </a:prstGeom>
+          <a:solidFill>
+            <a:srgbClr val="2A2C35"/>
+          </a:solidFill>
+          <a:ln/>
         </p:spPr>
       </p:sp>
       <p:sp>
@@ -40960,21 +41340,16 @@
         </p:nvSpPr>
         <p:spPr>
           <a:xfrm>
-            <a:off x="640080" y="6419088"/>
-            <a:ext cx="10911535" cy="0"/>
-          </a:xfrm>
-          <a:prstGeom prst="line">
-            <a:avLst/>
-          </a:prstGeom>
-          <a:noFill/>
-          <a:ln w="9525">
-            <a:solidFill>
-              <a:srgbClr val="2A2C35"/>
-            </a:solidFill>
-            <a:prstDash val="solid"/>
-            <a:headEnd type="none"/>
-            <a:tailEnd type="none"/>
-          </a:ln>
+            <a:off x="640080" y="6413602"/>
+            <a:ext cx="10911535" cy="10973"/>
+          </a:xfrm>
+          <a:prstGeom prst="rect">
+            <a:avLst/>
+          </a:prstGeom>
+          <a:solidFill>
+            <a:srgbClr val="2A2C35"/>
+          </a:solidFill>
+          <a:ln/>
         </p:spPr>
       </p:sp>
       <p:sp>
@@ -41235,21 +41610,16 @@
         </p:nvSpPr>
         <p:spPr>
           <a:xfrm>
-            <a:off x="640080" y="6419088"/>
-            <a:ext cx="10911535" cy="0"/>
-          </a:xfrm>
-          <a:prstGeom prst="line">
-            <a:avLst/>
-          </a:prstGeom>
-          <a:noFill/>
-          <a:ln w="9525">
-            <a:solidFill>
-              <a:srgbClr val="2A2C35"/>
-            </a:solidFill>
-            <a:prstDash val="solid"/>
-            <a:headEnd type="none"/>
-            <a:tailEnd type="none"/>
-          </a:ln>
+            <a:off x="640080" y="6413602"/>
+            <a:ext cx="10911535" cy="10973"/>
+          </a:xfrm>
+          <a:prstGeom prst="rect">
+            <a:avLst/>
+          </a:prstGeom>
+          <a:solidFill>
+            <a:srgbClr val="2A2C35"/>
+          </a:solidFill>
+          <a:ln/>
         </p:spPr>
       </p:sp>
       <p:sp>
@@ -42019,21 +42389,16 @@
         </p:nvSpPr>
         <p:spPr>
           <a:xfrm>
-            <a:off x="640080" y="6419088"/>
-            <a:ext cx="10911535" cy="0"/>
-          </a:xfrm>
-          <a:prstGeom prst="line">
-            <a:avLst/>
-          </a:prstGeom>
-          <a:noFill/>
-          <a:ln w="9525">
-            <a:solidFill>
-              <a:srgbClr val="2A2C35"/>
-            </a:solidFill>
-            <a:prstDash val="solid"/>
-            <a:headEnd type="none"/>
-            <a:tailEnd type="none"/>
-          </a:ln>
+            <a:off x="640080" y="6413602"/>
+            <a:ext cx="10911535" cy="10973"/>
+          </a:xfrm>
+          <a:prstGeom prst="rect">
+            <a:avLst/>
+          </a:prstGeom>
+          <a:solidFill>
+            <a:srgbClr val="2A2C35"/>
+          </a:solidFill>
+          <a:ln/>
         </p:spPr>
       </p:sp>
       <p:sp>
@@ -42289,21 +42654,16 @@
         </p:nvSpPr>
         <p:spPr>
           <a:xfrm>
-            <a:off x="896112" y="3931920"/>
-            <a:ext cx="4773168" cy="0"/>
-          </a:xfrm>
-          <a:prstGeom prst="line">
-            <a:avLst/>
-          </a:prstGeom>
-          <a:noFill/>
-          <a:ln w="12700">
-            <a:solidFill>
-              <a:srgbClr val="2A2C35"/>
-            </a:solidFill>
-            <a:prstDash val="solid"/>
-            <a:headEnd type="none"/>
-            <a:tailEnd type="none"/>
-          </a:ln>
+            <a:off x="896112" y="3925570"/>
+            <a:ext cx="4773168" cy="12700"/>
+          </a:xfrm>
+          <a:prstGeom prst="rect">
+            <a:avLst/>
+          </a:prstGeom>
+          <a:solidFill>
+            <a:srgbClr val="2A2C35"/>
+          </a:solidFill>
+          <a:ln/>
         </p:spPr>
       </p:sp>
       <p:sp>
@@ -43313,21 +43673,16 @@
         </p:nvSpPr>
         <p:spPr>
           <a:xfrm>
-            <a:off x="640080" y="6419088"/>
-            <a:ext cx="10911535" cy="0"/>
-          </a:xfrm>
-          <a:prstGeom prst="line">
-            <a:avLst/>
-          </a:prstGeom>
-          <a:noFill/>
-          <a:ln w="9525">
-            <a:solidFill>
-              <a:srgbClr val="2A2C35"/>
-            </a:solidFill>
-            <a:prstDash val="solid"/>
-            <a:headEnd type="none"/>
-            <a:tailEnd type="none"/>
-          </a:ln>
+            <a:off x="640080" y="6413602"/>
+            <a:ext cx="10911535" cy="10973"/>
+          </a:xfrm>
+          <a:prstGeom prst="rect">
+            <a:avLst/>
+          </a:prstGeom>
+          <a:solidFill>
+            <a:srgbClr val="2A2C35"/>
+          </a:solidFill>
+          <a:ln/>
         </p:spPr>
       </p:sp>
       <p:sp>
@@ -43588,21 +43943,16 @@
         </p:nvSpPr>
         <p:spPr>
           <a:xfrm>
-            <a:off x="640080" y="6419088"/>
-            <a:ext cx="10911535" cy="0"/>
-          </a:xfrm>
-          <a:prstGeom prst="line">
-            <a:avLst/>
-          </a:prstGeom>
-          <a:noFill/>
-          <a:ln w="9525">
-            <a:solidFill>
-              <a:srgbClr val="2A2C35"/>
-            </a:solidFill>
-            <a:prstDash val="solid"/>
-            <a:headEnd type="none"/>
-            <a:tailEnd type="none"/>
-          </a:ln>
+            <a:off x="640080" y="6413602"/>
+            <a:ext cx="10911535" cy="10973"/>
+          </a:xfrm>
+          <a:prstGeom prst="rect">
+            <a:avLst/>
+          </a:prstGeom>
+          <a:solidFill>
+            <a:srgbClr val="2A2C35"/>
+          </a:solidFill>
+          <a:ln/>
         </p:spPr>
       </p:sp>
       <p:sp>
@@ -44912,21 +45262,16 @@
         </p:nvSpPr>
         <p:spPr>
           <a:xfrm>
-            <a:off x="4069080" y="3840480"/>
-            <a:ext cx="320040" cy="0"/>
-          </a:xfrm>
-          <a:prstGeom prst="line">
-            <a:avLst/>
-          </a:prstGeom>
-          <a:noFill/>
-          <a:ln w="22225">
-            <a:solidFill>
-              <a:srgbClr val="9AA0AC"/>
-            </a:solidFill>
-            <a:prstDash val="solid"/>
-            <a:headEnd type="none"/>
-            <a:tailEnd type="triangle"/>
-          </a:ln>
+            <a:off x="4069080" y="3829368"/>
+            <a:ext cx="237744" cy="22225"/>
+          </a:xfrm>
+          <a:prstGeom prst="rect">
+            <a:avLst/>
+          </a:prstGeom>
+          <a:solidFill>
+            <a:srgbClr val="9AA0AC"/>
+          </a:solidFill>
+          <a:ln/>
         </p:spPr>
       </p:sp>
       <p:sp>
@@ -44936,27 +45281,62 @@
           <p:nvPr/>
         </p:nvSpPr>
         <p:spPr>
-          <a:xfrm>
-            <a:off x="7818120" y="3840480"/>
-            <a:ext cx="320040" cy="0"/>
-          </a:xfrm>
-          <a:prstGeom prst="line">
-            <a:avLst/>
-          </a:prstGeom>
-          <a:noFill/>
-          <a:ln w="22225">
-            <a:solidFill>
-              <a:srgbClr val="9AA0AC"/>
-            </a:solidFill>
-            <a:prstDash val="solid"/>
-            <a:headEnd type="none"/>
-            <a:tailEnd type="triangle"/>
-          </a:ln>
-        </p:spPr>
-      </p:sp>
-      <p:sp>
-        <p:nvSpPr>
-          <p:cNvPr id="49" name="Text 47"/>
+          <a:xfrm rot="5400000">
+            <a:off x="4262247" y="3771900"/>
+            <a:ext cx="116586" cy="137160"/>
+          </a:xfrm>
+          <a:prstGeom prst="triangle">
+            <a:avLst/>
+          </a:prstGeom>
+          <a:solidFill>
+            <a:srgbClr val="9AA0AC"/>
+          </a:solidFill>
+          <a:ln/>
+        </p:spPr>
+      </p:sp>
+      <p:sp>
+        <p:nvSpPr>
+          <p:cNvPr id="49" name="Shape 47"/>
+          <p:cNvSpPr/>
+          <p:nvPr/>
+        </p:nvSpPr>
+        <p:spPr>
+          <a:xfrm>
+            <a:off x="7818120" y="3829368"/>
+            <a:ext cx="237744" cy="22225"/>
+          </a:xfrm>
+          <a:prstGeom prst="rect">
+            <a:avLst/>
+          </a:prstGeom>
+          <a:solidFill>
+            <a:srgbClr val="9AA0AC"/>
+          </a:solidFill>
+          <a:ln/>
+        </p:spPr>
+      </p:sp>
+      <p:sp>
+        <p:nvSpPr>
+          <p:cNvPr id="50" name="Shape 48"/>
+          <p:cNvSpPr/>
+          <p:nvPr/>
+        </p:nvSpPr>
+        <p:spPr>
+          <a:xfrm rot="5400000">
+            <a:off x="8011287" y="3771900"/>
+            <a:ext cx="116586" cy="137160"/>
+          </a:xfrm>
+          <a:prstGeom prst="triangle">
+            <a:avLst/>
+          </a:prstGeom>
+          <a:solidFill>
+            <a:srgbClr val="9AA0AC"/>
+          </a:solidFill>
+          <a:ln/>
+        </p:spPr>
+      </p:sp>
+      <p:sp>
+        <p:nvSpPr>
+          <p:cNvPr id="51" name="Text 49"/>
           <p:cNvSpPr/>
           <p:nvPr/>
         </p:nvSpPr>
@@ -44995,7 +45375,7 @@
       </p:sp>
       <p:sp>
         <p:nvSpPr>
-          <p:cNvPr id="50" name="Text 48"/>
+          <p:cNvPr id="52" name="Text 50"/>
           <p:cNvSpPr/>
           <p:nvPr/>
         </p:nvSpPr>
@@ -45212,21 +45592,16 @@
         </p:nvSpPr>
         <p:spPr>
           <a:xfrm>
-            <a:off x="640080" y="6419088"/>
-            <a:ext cx="10911535" cy="0"/>
-          </a:xfrm>
-          <a:prstGeom prst="line">
-            <a:avLst/>
-          </a:prstGeom>
-          <a:noFill/>
-          <a:ln w="9525">
-            <a:solidFill>
-              <a:srgbClr val="2A2C35"/>
-            </a:solidFill>
-            <a:prstDash val="solid"/>
-            <a:headEnd type="none"/>
-            <a:tailEnd type="none"/>
-          </a:ln>
+            <a:off x="640080" y="6413602"/>
+            <a:ext cx="10911535" cy="10973"/>
+          </a:xfrm>
+          <a:prstGeom prst="rect">
+            <a:avLst/>
+          </a:prstGeom>
+          <a:solidFill>
+            <a:srgbClr val="2A2C35"/>
+          </a:solidFill>
+          <a:ln/>
         </p:spPr>
       </p:sp>
       <p:sp>
@@ -46494,26 +46869,41 @@
         </p:nvSpPr>
         <p:spPr>
           <a:xfrm>
-            <a:off x="3840480" y="2971800"/>
-            <a:ext cx="1051560" cy="0"/>
-          </a:xfrm>
-          <a:prstGeom prst="line">
-            <a:avLst/>
-          </a:prstGeom>
-          <a:noFill/>
-          <a:ln w="22225">
-            <a:solidFill>
-              <a:srgbClr val="9AA0AC"/>
-            </a:solidFill>
-            <a:prstDash val="solid"/>
-            <a:headEnd type="none"/>
-            <a:tailEnd type="triangle"/>
-          </a:ln>
-        </p:spPr>
-      </p:sp>
-      <p:sp>
-        <p:nvSpPr>
-          <p:cNvPr id="46" name="Text 44"/>
+            <a:off x="3840480" y="2960688"/>
+            <a:ext cx="969264" cy="22225"/>
+          </a:xfrm>
+          <a:prstGeom prst="rect">
+            <a:avLst/>
+          </a:prstGeom>
+          <a:solidFill>
+            <a:srgbClr val="9AA0AC"/>
+          </a:solidFill>
+          <a:ln/>
+        </p:spPr>
+      </p:sp>
+      <p:sp>
+        <p:nvSpPr>
+          <p:cNvPr id="46" name="Shape 44"/>
+          <p:cNvSpPr/>
+          <p:nvPr/>
+        </p:nvSpPr>
+        <p:spPr>
+          <a:xfrm rot="5400000">
+            <a:off x="4765167" y="2903220"/>
+            <a:ext cx="116586" cy="137160"/>
+          </a:xfrm>
+          <a:prstGeom prst="triangle">
+            <a:avLst/>
+          </a:prstGeom>
+          <a:solidFill>
+            <a:srgbClr val="9AA0AC"/>
+          </a:solidFill>
+          <a:ln/>
+        </p:spPr>
+      </p:sp>
+      <p:sp>
+        <p:nvSpPr>
+          <p:cNvPr id="47" name="Text 45"/>
           <p:cNvSpPr/>
           <p:nvPr/>
         </p:nvSpPr>
@@ -46552,52 +46942,22 @@
       </p:sp>
       <p:sp>
         <p:nvSpPr>
-          <p:cNvPr id="47" name="Shape 45"/>
-          <p:cNvSpPr/>
-          <p:nvPr/>
-        </p:nvSpPr>
-        <p:spPr>
-          <a:xfrm>
-            <a:off x="8138160" y="2788920"/>
-            <a:ext cx="1051560" cy="-365760"/>
-          </a:xfrm>
-          <a:prstGeom prst="line">
-            <a:avLst/>
-          </a:prstGeom>
-          <a:noFill/>
-          <a:ln w="19050">
-            <a:solidFill>
-              <a:srgbClr val="F5B94D"/>
-            </a:solidFill>
-            <a:prstDash val="solid"/>
-            <a:headEnd type="none"/>
-            <a:tailEnd type="triangle"/>
-          </a:ln>
-        </p:spPr>
-      </p:sp>
-      <p:sp>
-        <p:nvSpPr>
           <p:cNvPr id="48" name="Shape 46"/>
           <p:cNvSpPr/>
           <p:nvPr/>
         </p:nvSpPr>
         <p:spPr>
-          <a:xfrm>
-            <a:off x="8138160" y="3291840"/>
-            <a:ext cx="1051560" cy="228600"/>
-          </a:xfrm>
-          <a:prstGeom prst="line">
-            <a:avLst/>
-          </a:prstGeom>
-          <a:noFill/>
-          <a:ln w="19050">
-            <a:solidFill>
-              <a:srgbClr val="4ADE80"/>
-            </a:solidFill>
-            <a:prstDash val="solid"/>
-            <a:headEnd type="none"/>
-            <a:tailEnd type="triangle"/>
-          </a:ln>
+          <a:xfrm rot="-1150740">
+            <a:off x="8109546" y="2610033"/>
+            <a:ext cx="1031059" cy="19050"/>
+          </a:xfrm>
+          <a:prstGeom prst="rect">
+            <a:avLst/>
+          </a:prstGeom>
+          <a:solidFill>
+            <a:srgbClr val="F5B94D"/>
+          </a:solidFill>
+          <a:ln/>
         </p:spPr>
       </p:sp>
       <p:sp>
@@ -46607,22 +46967,17 @@
           <p:nvPr/>
         </p:nvSpPr>
         <p:spPr>
-          <a:xfrm>
-            <a:off x="2240280" y="3886200"/>
-            <a:ext cx="0" cy="1645920"/>
-          </a:xfrm>
-          <a:prstGeom prst="line">
-            <a:avLst/>
-          </a:prstGeom>
-          <a:noFill/>
-          <a:ln w="15875">
-            <a:solidFill>
-              <a:srgbClr val="5B8CFF"/>
-            </a:solidFill>
-            <a:prstDash val="dash"/>
-            <a:headEnd type="none"/>
-            <a:tailEnd type="none"/>
-          </a:ln>
+          <a:xfrm rot="4249260">
+            <a:off x="9066653" y="2377110"/>
+            <a:ext cx="116586" cy="137160"/>
+          </a:xfrm>
+          <a:prstGeom prst="triangle">
+            <a:avLst/>
+          </a:prstGeom>
+          <a:solidFill>
+            <a:srgbClr val="F5B94D"/>
+          </a:solidFill>
+          <a:ln/>
         </p:spPr>
       </p:sp>
       <p:sp>
@@ -46632,27 +46987,322 @@
           <p:nvPr/>
         </p:nvSpPr>
         <p:spPr>
-          <a:xfrm>
-            <a:off x="2240280" y="5532120"/>
-            <a:ext cx="6949440" cy="-914400"/>
-          </a:xfrm>
-          <a:prstGeom prst="line">
-            <a:avLst/>
-          </a:prstGeom>
-          <a:noFill/>
-          <a:ln w="15875">
-            <a:solidFill>
-              <a:srgbClr val="5B8CFF"/>
-            </a:solidFill>
-            <a:prstDash val="solid"/>
-            <a:headEnd type="none"/>
-            <a:tailEnd type="triangle"/>
-          </a:ln>
-        </p:spPr>
-      </p:sp>
-      <p:sp>
-        <p:nvSpPr>
-          <p:cNvPr id="51" name="Text 49"/>
+          <a:xfrm rot="735886">
+            <a:off x="8126819" y="3387874"/>
+            <a:ext cx="993825" cy="19050"/>
+          </a:xfrm>
+          <a:prstGeom prst="rect">
+            <a:avLst/>
+          </a:prstGeom>
+          <a:solidFill>
+            <a:srgbClr val="4ADE80"/>
+          </a:solidFill>
+          <a:ln/>
+        </p:spPr>
+      </p:sp>
+      <p:sp>
+        <p:nvSpPr>
+          <p:cNvPr id="51" name="Shape 49"/>
+          <p:cNvSpPr/>
+          <p:nvPr/>
+        </p:nvSpPr>
+        <p:spPr>
+          <a:xfrm rot="6135886">
+            <a:off x="9064412" y="3437292"/>
+            <a:ext cx="116586" cy="137160"/>
+          </a:xfrm>
+          <a:prstGeom prst="triangle">
+            <a:avLst/>
+          </a:prstGeom>
+          <a:solidFill>
+            <a:srgbClr val="4ADE80"/>
+          </a:solidFill>
+          <a:ln/>
+        </p:spPr>
+      </p:sp>
+      <p:sp>
+        <p:nvSpPr>
+          <p:cNvPr id="52" name="Shape 50"/>
+          <p:cNvSpPr/>
+          <p:nvPr/>
+        </p:nvSpPr>
+        <p:spPr>
+          <a:xfrm rot="5400000">
+            <a:off x="2199132" y="3919411"/>
+            <a:ext cx="82296" cy="15875"/>
+          </a:xfrm>
+          <a:prstGeom prst="rect">
+            <a:avLst/>
+          </a:prstGeom>
+          <a:solidFill>
+            <a:srgbClr val="5B8CFF"/>
+          </a:solidFill>
+          <a:ln/>
+        </p:spPr>
+      </p:sp>
+      <p:sp>
+        <p:nvSpPr>
+          <p:cNvPr id="53" name="Shape 51"/>
+          <p:cNvSpPr/>
+          <p:nvPr/>
+        </p:nvSpPr>
+        <p:spPr>
+          <a:xfrm rot="5400000">
+            <a:off x="2199132" y="4065715"/>
+            <a:ext cx="82296" cy="15875"/>
+          </a:xfrm>
+          <a:prstGeom prst="rect">
+            <a:avLst/>
+          </a:prstGeom>
+          <a:solidFill>
+            <a:srgbClr val="5B8CFF"/>
+          </a:solidFill>
+          <a:ln/>
+        </p:spPr>
+      </p:sp>
+      <p:sp>
+        <p:nvSpPr>
+          <p:cNvPr id="54" name="Shape 52"/>
+          <p:cNvSpPr/>
+          <p:nvPr/>
+        </p:nvSpPr>
+        <p:spPr>
+          <a:xfrm rot="5400000">
+            <a:off x="2199132" y="4212019"/>
+            <a:ext cx="82296" cy="15875"/>
+          </a:xfrm>
+          <a:prstGeom prst="rect">
+            <a:avLst/>
+          </a:prstGeom>
+          <a:solidFill>
+            <a:srgbClr val="5B8CFF"/>
+          </a:solidFill>
+          <a:ln/>
+        </p:spPr>
+      </p:sp>
+      <p:sp>
+        <p:nvSpPr>
+          <p:cNvPr id="55" name="Shape 53"/>
+          <p:cNvSpPr/>
+          <p:nvPr/>
+        </p:nvSpPr>
+        <p:spPr>
+          <a:xfrm rot="5400000">
+            <a:off x="2199132" y="4358323"/>
+            <a:ext cx="82296" cy="15875"/>
+          </a:xfrm>
+          <a:prstGeom prst="rect">
+            <a:avLst/>
+          </a:prstGeom>
+          <a:solidFill>
+            <a:srgbClr val="5B8CFF"/>
+          </a:solidFill>
+          <a:ln/>
+        </p:spPr>
+      </p:sp>
+      <p:sp>
+        <p:nvSpPr>
+          <p:cNvPr id="56" name="Shape 54"/>
+          <p:cNvSpPr/>
+          <p:nvPr/>
+        </p:nvSpPr>
+        <p:spPr>
+          <a:xfrm rot="5400000">
+            <a:off x="2199132" y="4504627"/>
+            <a:ext cx="82296" cy="15875"/>
+          </a:xfrm>
+          <a:prstGeom prst="rect">
+            <a:avLst/>
+          </a:prstGeom>
+          <a:solidFill>
+            <a:srgbClr val="5B8CFF"/>
+          </a:solidFill>
+          <a:ln/>
+        </p:spPr>
+      </p:sp>
+      <p:sp>
+        <p:nvSpPr>
+          <p:cNvPr id="57" name="Shape 55"/>
+          <p:cNvSpPr/>
+          <p:nvPr/>
+        </p:nvSpPr>
+        <p:spPr>
+          <a:xfrm rot="5400000">
+            <a:off x="2199132" y="4650931"/>
+            <a:ext cx="82296" cy="15875"/>
+          </a:xfrm>
+          <a:prstGeom prst="rect">
+            <a:avLst/>
+          </a:prstGeom>
+          <a:solidFill>
+            <a:srgbClr val="5B8CFF"/>
+          </a:solidFill>
+          <a:ln/>
+        </p:spPr>
+      </p:sp>
+      <p:sp>
+        <p:nvSpPr>
+          <p:cNvPr id="58" name="Shape 56"/>
+          <p:cNvSpPr/>
+          <p:nvPr/>
+        </p:nvSpPr>
+        <p:spPr>
+          <a:xfrm rot="5400000">
+            <a:off x="2199132" y="4797235"/>
+            <a:ext cx="82296" cy="15875"/>
+          </a:xfrm>
+          <a:prstGeom prst="rect">
+            <a:avLst/>
+          </a:prstGeom>
+          <a:solidFill>
+            <a:srgbClr val="5B8CFF"/>
+          </a:solidFill>
+          <a:ln/>
+        </p:spPr>
+      </p:sp>
+      <p:sp>
+        <p:nvSpPr>
+          <p:cNvPr id="59" name="Shape 57"/>
+          <p:cNvSpPr/>
+          <p:nvPr/>
+        </p:nvSpPr>
+        <p:spPr>
+          <a:xfrm rot="5400000">
+            <a:off x="2199132" y="4943539"/>
+            <a:ext cx="82296" cy="15875"/>
+          </a:xfrm>
+          <a:prstGeom prst="rect">
+            <a:avLst/>
+          </a:prstGeom>
+          <a:solidFill>
+            <a:srgbClr val="5B8CFF"/>
+          </a:solidFill>
+          <a:ln/>
+        </p:spPr>
+      </p:sp>
+      <p:sp>
+        <p:nvSpPr>
+          <p:cNvPr id="60" name="Shape 58"/>
+          <p:cNvSpPr/>
+          <p:nvPr/>
+        </p:nvSpPr>
+        <p:spPr>
+          <a:xfrm rot="5400000">
+            <a:off x="2199132" y="5089843"/>
+            <a:ext cx="82296" cy="15875"/>
+          </a:xfrm>
+          <a:prstGeom prst="rect">
+            <a:avLst/>
+          </a:prstGeom>
+          <a:solidFill>
+            <a:srgbClr val="5B8CFF"/>
+          </a:solidFill>
+          <a:ln/>
+        </p:spPr>
+      </p:sp>
+      <p:sp>
+        <p:nvSpPr>
+          <p:cNvPr id="61" name="Shape 59"/>
+          <p:cNvSpPr/>
+          <p:nvPr/>
+        </p:nvSpPr>
+        <p:spPr>
+          <a:xfrm rot="5400000">
+            <a:off x="2199132" y="5236147"/>
+            <a:ext cx="82296" cy="15875"/>
+          </a:xfrm>
+          <a:prstGeom prst="rect">
+            <a:avLst/>
+          </a:prstGeom>
+          <a:solidFill>
+            <a:srgbClr val="5B8CFF"/>
+          </a:solidFill>
+          <a:ln/>
+        </p:spPr>
+      </p:sp>
+      <p:sp>
+        <p:nvSpPr>
+          <p:cNvPr id="62" name="Shape 60"/>
+          <p:cNvSpPr/>
+          <p:nvPr/>
+        </p:nvSpPr>
+        <p:spPr>
+          <a:xfrm rot="5400000">
+            <a:off x="2199132" y="5382451"/>
+            <a:ext cx="82296" cy="15875"/>
+          </a:xfrm>
+          <a:prstGeom prst="rect">
+            <a:avLst/>
+          </a:prstGeom>
+          <a:solidFill>
+            <a:srgbClr val="5B8CFF"/>
+          </a:solidFill>
+          <a:ln/>
+        </p:spPr>
+      </p:sp>
+      <p:sp>
+        <p:nvSpPr>
+          <p:cNvPr id="63" name="Shape 61"/>
+          <p:cNvSpPr/>
+          <p:nvPr/>
+        </p:nvSpPr>
+        <p:spPr>
+          <a:xfrm rot="5400000">
+            <a:off x="2221992" y="5505895"/>
+            <a:ext cx="36576" cy="15875"/>
+          </a:xfrm>
+          <a:prstGeom prst="rect">
+            <a:avLst/>
+          </a:prstGeom>
+          <a:solidFill>
+            <a:srgbClr val="5B8CFF"/>
+          </a:solidFill>
+          <a:ln/>
+        </p:spPr>
+      </p:sp>
+      <p:sp>
+        <p:nvSpPr>
+          <p:cNvPr id="64" name="Shape 62"/>
+          <p:cNvSpPr/>
+          <p:nvPr/>
+        </p:nvSpPr>
+        <p:spPr>
+          <a:xfrm rot="-449751">
+            <a:off x="2210682" y="5072350"/>
+            <a:ext cx="6927044" cy="15875"/>
+          </a:xfrm>
+          <a:prstGeom prst="rect">
+            <a:avLst/>
+          </a:prstGeom>
+          <a:solidFill>
+            <a:srgbClr val="5B8CFF"/>
+          </a:solidFill>
+          <a:ln/>
+        </p:spPr>
+      </p:sp>
+      <p:sp>
+        <p:nvSpPr>
+          <p:cNvPr id="65" name="Shape 63"/>
+          <p:cNvSpPr/>
+          <p:nvPr/>
+        </p:nvSpPr>
+        <p:spPr>
+          <a:xfrm rot="4950249">
+            <a:off x="9063433" y="4558087"/>
+            <a:ext cx="116586" cy="137160"/>
+          </a:xfrm>
+          <a:prstGeom prst="triangle">
+            <a:avLst/>
+          </a:prstGeom>
+          <a:solidFill>
+            <a:srgbClr val="5B8CFF"/>
+          </a:solidFill>
+          <a:ln/>
+        </p:spPr>
+      </p:sp>
+      <p:sp>
+        <p:nvSpPr>
+          <p:cNvPr id="66" name="Text 64"/>
           <p:cNvSpPr/>
           <p:nvPr/>
         </p:nvSpPr>
@@ -46691,7 +47341,7 @@
       </p:sp>
       <p:sp>
         <p:nvSpPr>
-          <p:cNvPr id="52" name="Shape 50"/>
+          <p:cNvPr id="67" name="Shape 65"/>
           <p:cNvSpPr/>
           <p:nvPr/>
         </p:nvSpPr>
@@ -46718,7 +47368,7 @@
       </p:sp>
       <p:sp>
         <p:nvSpPr>
-          <p:cNvPr id="53" name="Text 51"/>
+          <p:cNvPr id="68" name="Text 66"/>
           <p:cNvSpPr/>
           <p:nvPr/>
         </p:nvSpPr>
@@ -46757,7 +47407,7 @@
       </p:sp>
       <p:sp>
         <p:nvSpPr>
-          <p:cNvPr id="54" name="Text 52"/>
+          <p:cNvPr id="69" name="Text 67"/>
           <p:cNvSpPr/>
           <p:nvPr/>
         </p:nvSpPr>
@@ -46819,27 +47469,42 @@
       </p:sp>
       <p:sp>
         <p:nvSpPr>
-          <p:cNvPr id="55" name="Shape 53"/>
-          <p:cNvSpPr/>
-          <p:nvPr/>
-        </p:nvSpPr>
-        <p:spPr>
-          <a:xfrm>
-            <a:off x="3291840" y="4480560"/>
-            <a:ext cx="5897880" cy="-1234440"/>
-          </a:xfrm>
-          <a:prstGeom prst="line">
-            <a:avLst/>
-          </a:prstGeom>
-          <a:noFill/>
-          <a:ln w="12700">
-            <a:solidFill>
-              <a:srgbClr val="A78BFA"/>
-            </a:solidFill>
-            <a:prstDash val="solid"/>
-            <a:headEnd type="none"/>
-            <a:tailEnd type="triangle"/>
-          </a:ln>
+          <p:cNvPr id="70" name="Shape 68"/>
+          <p:cNvSpPr/>
+          <p:nvPr/>
+        </p:nvSpPr>
+        <p:spPr>
+          <a:xfrm rot="-709289">
+            <a:off x="3228812" y="3865420"/>
+            <a:ext cx="5943385" cy="12700"/>
+          </a:xfrm>
+          <a:prstGeom prst="rect">
+            <a:avLst/>
+          </a:prstGeom>
+          <a:solidFill>
+            <a:srgbClr val="A78BFA"/>
+          </a:solidFill>
+          <a:ln/>
+        </p:spPr>
+      </p:sp>
+      <p:sp>
+        <p:nvSpPr>
+          <p:cNvPr id="71" name="Shape 69"/>
+          <p:cNvSpPr/>
+          <p:nvPr/>
+        </p:nvSpPr>
+        <p:spPr>
+          <a:xfrm rot="4690711">
+            <a:off x="9064302" y="3191590"/>
+            <a:ext cx="116586" cy="137160"/>
+          </a:xfrm>
+          <a:prstGeom prst="triangle">
+            <a:avLst/>
+          </a:prstGeom>
+          <a:solidFill>
+            <a:srgbClr val="A78BFA"/>
+          </a:solidFill>
+          <a:ln/>
         </p:spPr>
       </p:sp>
     </p:spTree>
